--- a/docs/entreprise/deck/Quantinvo-tarification.pptx
+++ b/docs/entreprise/deck/Quantinvo-tarification.pptx
@@ -864,7 +864,7 @@
           <a:p>
             <a:r>
               <a:rPr lang="en-US" dirty="0"/>
-              <a:t>Annoncer le mensuel : un acheteur compare en mois. L'annuel se présente ensuite comme une économie en euros — 300 € sur Advanced —, jamais en pourcentage.</a:t>
+              <a:t>Annoncer le mensuel : un acheteur compare en mois. L'annuel se présente ensuite comme une économie en euros — 420 € sur Advanced —, jamais en pourcentage.</a:t>
             </a:r>
             <a:endParaRPr lang="en-US" dirty="0"/>
           </a:p>
@@ -2781,7 +2781,7 @@
                 <a:ea typeface="Arial" pitchFamily="34" charset="-122"/>
                 <a:cs typeface="Arial" pitchFamily="34" charset="-120"/>
               </a:rPr>
-              <a:t>À 2 400 € par an, une équipe de vingt personnes qui compte toute l'année coûte moins qu'un seul passage de prestataire dans la plupart des magasins.</a:t>
+              <a:t>À 3 300 € par an, une équipe de vingt personnes qui compte toute l'année coûte moins qu'un seul passage de prestataire dans la plupart des magasins.</a:t>
             </a:r>
             <a:endParaRPr lang="en-US" sz="1150" dirty="0"/>
           </a:p>
@@ -4085,7 +4085,7 @@
                 <a:ea typeface="Arial" pitchFamily="34" charset="-122"/>
                 <a:cs typeface="Arial" pitchFamily="34" charset="-120"/>
               </a:rPr>
-              <a:t>65 €</a:t>
+              <a:t>89 €</a:t>
             </a:r>
             <a:pPr indent="0" marL="0">
               <a:buNone/>
@@ -4138,7 +4138,7 @@
                 <a:ea typeface="Arial" pitchFamily="34" charset="-122"/>
                 <a:cs typeface="Arial" pitchFamily="34" charset="-120"/>
               </a:rPr>
-              <a:t>ou 690 € à l’année — 90 € de moins</a:t>
+              <a:t>ou 950 € à l’année — 118 € de moins</a:t>
             </a:r>
             <a:endParaRPr lang="en-US" sz="950" dirty="0"/>
           </a:p>
@@ -4528,7 +4528,7 @@
                 <a:ea typeface="Arial" pitchFamily="34" charset="-122"/>
                 <a:cs typeface="Arial" pitchFamily="34" charset="-120"/>
               </a:rPr>
-              <a:t>225 €</a:t>
+              <a:t>310 €</a:t>
             </a:r>
             <a:pPr indent="0" marL="0">
               <a:buNone/>
@@ -4581,7 +4581,7 @@
                 <a:ea typeface="Arial" pitchFamily="34" charset="-122"/>
                 <a:cs typeface="Arial" pitchFamily="34" charset="-120"/>
               </a:rPr>
-              <a:t>ou 2 400 € à l’année — 300 € de moins</a:t>
+              <a:t>ou 3 300 € à l’année — 420 € de moins</a:t>
             </a:r>
             <a:endParaRPr lang="en-US" sz="950" dirty="0"/>
           </a:p>
@@ -4932,7 +4932,7 @@
                 <a:ea typeface="Arial" pitchFamily="34" charset="-122"/>
                 <a:cs typeface="Arial" pitchFamily="34" charset="-120"/>
               </a:rPr>
-              <a:t>650 €</a:t>
+              <a:t>890 €</a:t>
             </a:r>
             <a:pPr indent="0" marL="0">
               <a:buNone/>
@@ -4985,7 +4985,7 @@
                 <a:ea typeface="Arial" pitchFamily="34" charset="-122"/>
                 <a:cs typeface="Arial" pitchFamily="34" charset="-120"/>
               </a:rPr>
-              <a:t>ou 6 900 € à l’année — 900 € de moins</a:t>
+              <a:t>ou 9 450 € à l’année — 1 230 € de moins</a:t>
             </a:r>
             <a:endParaRPr lang="en-US" sz="950" dirty="0"/>
           </a:p>
@@ -5192,7 +5192,7 @@
                 <a:ea typeface="Arial" pitchFamily="34" charset="-122"/>
                 <a:cs typeface="Arial" pitchFamily="34" charset="-120"/>
               </a:rPr>
-              <a:t>Plus de 100 appareils dans un même magasin ? 47 € par mois, ou 500 € à l’année, par tranche de 10 appareils supplémentaires.</a:t>
+              <a:t>Plus de 100 appareils dans un même magasin ? 64 € par mois, ou 690 € à l’année, par tranche de 10 appareils supplémentaires.</a:t>
             </a:r>
             <a:endParaRPr lang="en-US" sz="1100" dirty="0"/>
           </a:p>
@@ -7280,7 +7280,7 @@
                 <a:ea typeface="Arial" pitchFamily="34" charset="-122"/>
                 <a:cs typeface="Arial" pitchFamily="34" charset="-120"/>
               </a:rPr>
-              <a:t>65 €</a:t>
+              <a:t>89 €</a:t>
             </a:r>
             <a:endParaRPr lang="en-US" sz="1700" dirty="0"/>
           </a:p>
@@ -7319,7 +7319,7 @@
                 <a:ea typeface="Arial" pitchFamily="34" charset="-122"/>
                 <a:cs typeface="Arial" pitchFamily="34" charset="-120"/>
               </a:rPr>
-              <a:t>690 €</a:t>
+              <a:t>950 €</a:t>
             </a:r>
             <a:endParaRPr lang="en-US" sz="1700" dirty="0"/>
           </a:p>
@@ -7358,7 +7358,7 @@
                 <a:ea typeface="Arial" pitchFamily="34" charset="-122"/>
                 <a:cs typeface="Arial" pitchFamily="34" charset="-120"/>
               </a:rPr>
-              <a:t>90 €</a:t>
+              <a:t>118 €</a:t>
             </a:r>
             <a:endParaRPr lang="en-US" sz="1700" dirty="0"/>
           </a:p>
@@ -7498,7 +7498,7 @@
                 <a:ea typeface="Arial" pitchFamily="34" charset="-122"/>
                 <a:cs typeface="Arial" pitchFamily="34" charset="-120"/>
               </a:rPr>
-              <a:t>225 €</a:t>
+              <a:t>310 €</a:t>
             </a:r>
             <a:endParaRPr lang="en-US" sz="1700" dirty="0"/>
           </a:p>
@@ -7537,7 +7537,7 @@
                 <a:ea typeface="Arial" pitchFamily="34" charset="-122"/>
                 <a:cs typeface="Arial" pitchFamily="34" charset="-120"/>
               </a:rPr>
-              <a:t>2 400 €</a:t>
+              <a:t>3 300 €</a:t>
             </a:r>
             <a:endParaRPr lang="en-US" sz="1700" dirty="0"/>
           </a:p>
@@ -7576,7 +7576,7 @@
                 <a:ea typeface="Arial" pitchFamily="34" charset="-122"/>
                 <a:cs typeface="Arial" pitchFamily="34" charset="-120"/>
               </a:rPr>
-              <a:t>300 €</a:t>
+              <a:t>420 €</a:t>
             </a:r>
             <a:endParaRPr lang="en-US" sz="1700" dirty="0"/>
           </a:p>
@@ -7716,7 +7716,7 @@
                 <a:ea typeface="Arial" pitchFamily="34" charset="-122"/>
                 <a:cs typeface="Arial" pitchFamily="34" charset="-120"/>
               </a:rPr>
-              <a:t>650 €</a:t>
+              <a:t>890 €</a:t>
             </a:r>
             <a:endParaRPr lang="en-US" sz="1700" dirty="0"/>
           </a:p>
@@ -7755,7 +7755,7 @@
                 <a:ea typeface="Arial" pitchFamily="34" charset="-122"/>
                 <a:cs typeface="Arial" pitchFamily="34" charset="-120"/>
               </a:rPr>
-              <a:t>6 900 €</a:t>
+              <a:t>9 450 €</a:t>
             </a:r>
             <a:endParaRPr lang="en-US" sz="1700" dirty="0"/>
           </a:p>
@@ -7794,7 +7794,7 @@
                 <a:ea typeface="Arial" pitchFamily="34" charset="-122"/>
                 <a:cs typeface="Arial" pitchFamily="34" charset="-120"/>
               </a:rPr>
-              <a:t>900 €</a:t>
+              <a:t>1 230 €</a:t>
             </a:r>
             <a:endParaRPr lang="en-US" sz="1700" dirty="0"/>
           </a:p>

--- a/docs/entreprise/deck/Quantinvo-tarification.pptx
+++ b/docs/entreprise/deck/Quantinvo-tarification.pptx
@@ -1816,7 +1816,7 @@
             <a:r>
               <a:rPr lang="en-US" sz="2400" b="1" dirty="0">
                 <a:solidFill>
-                  <a:srgbClr val="0B0F19"/>
+                  <a:srgbClr val="14181A"/>
                 </a:solidFill>
                 <a:latin typeface="Arial" pitchFamily="34" charset="0"/>
                 <a:ea typeface="Arial" pitchFamily="34" charset="-122"/>
@@ -1837,17 +1837,17 @@
         <p:spPr>
           <a:xfrm>
             <a:off x="731520" y="1481328"/>
-            <a:ext cx="2377440" cy="25603"/>
+            <a:ext cx="2011680" cy="20117"/>
           </a:xfrm>
           <a:prstGeom prst="rect">
             <a:avLst/>
           </a:prstGeom>
           <a:solidFill>
-            <a:srgbClr val="38C9FF"/>
+            <a:srgbClr val="14181A"/>
           </a:solidFill>
           <a:ln w="12700">
             <a:solidFill>
-              <a:srgbClr val="38C9FF"/>
+              <a:srgbClr val="14181A"/>
             </a:solidFill>
             <a:prstDash val="solid"/>
           </a:ln>
@@ -1880,7 +1880,7 @@
             <a:r>
               <a:rPr lang="en-US" sz="1300" dirty="0">
                 <a:solidFill>
-                  <a:srgbClr val="5B6475"/>
+                  <a:srgbClr val="575F5C"/>
                 </a:solidFill>
                 <a:latin typeface="Arial" pitchFamily="34" charset="0"/>
                 <a:ea typeface="Arial" pitchFamily="34" charset="-122"/>
@@ -1922,7 +1922,7 @@
             <a:r>
               <a:rPr lang="en-US" sz="4000" b="1" dirty="0">
                 <a:solidFill>
-                  <a:srgbClr val="4636B0"/>
+                  <a:srgbClr val="14181A"/>
                 </a:solidFill>
                 <a:latin typeface="Arial" pitchFamily="34" charset="0"/>
                 <a:ea typeface="Arial" pitchFamily="34" charset="-122"/>
@@ -1964,7 +1964,7 @@
             <a:r>
               <a:rPr lang="en-US" sz="1500" dirty="0">
                 <a:solidFill>
-                  <a:srgbClr val="3D4556"/>
+                  <a:srgbClr val="3A423F"/>
                 </a:solidFill>
                 <a:latin typeface="Arial" pitchFamily="34" charset="0"/>
                 <a:ea typeface="Arial" pitchFamily="34" charset="-122"/>
@@ -2003,7 +2003,7 @@
             <a:r>
               <a:rPr lang="en-US" sz="1050" dirty="0">
                 <a:solidFill>
-                  <a:srgbClr val="5B6475"/>
+                  <a:srgbClr val="575F5C"/>
                 </a:solidFill>
                 <a:latin typeface="Arial" pitchFamily="34" charset="0"/>
                 <a:ea typeface="Arial" pitchFamily="34" charset="-122"/>
@@ -2098,7 +2098,7 @@
             <a:r>
               <a:rPr lang="en-US" sz="1600" b="1" dirty="0">
                 <a:solidFill>
-                  <a:srgbClr val="0B0F19"/>
+                  <a:srgbClr val="14181A"/>
                 </a:solidFill>
                 <a:latin typeface="Arial" pitchFamily="34" charset="0"/>
                 <a:ea typeface="Arial" pitchFamily="34" charset="-122"/>
@@ -2137,7 +2137,7 @@
             <a:r>
               <a:rPr lang="en-US" sz="1000" dirty="0">
                 <a:solidFill>
-                  <a:srgbClr val="5B6475"/>
+                  <a:srgbClr val="575F5C"/>
                 </a:solidFill>
                 <a:latin typeface="Arial" pitchFamily="34" charset="0"/>
                 <a:ea typeface="Arial" pitchFamily="34" charset="-122"/>
@@ -2158,17 +2158,17 @@
         <p:spPr>
           <a:xfrm>
             <a:off x="731520" y="877824"/>
-            <a:ext cx="10725912" cy="25603"/>
+            <a:ext cx="10725912" cy="10973"/>
           </a:xfrm>
           <a:prstGeom prst="rect">
             <a:avLst/>
           </a:prstGeom>
           <a:solidFill>
-            <a:srgbClr val="38C9FF"/>
+            <a:srgbClr val="E2E5E1"/>
           </a:solidFill>
           <a:ln w="12700">
             <a:solidFill>
-              <a:srgbClr val="38C9FF"/>
+              <a:srgbClr val="E2E5E1"/>
             </a:solidFill>
             <a:prstDash val="solid"/>
           </a:ln>
@@ -2204,7 +2204,7 @@
             <a:r>
               <a:rPr lang="en-US" sz="2600" b="1" dirty="0">
                 <a:solidFill>
-                  <a:srgbClr val="4636B0"/>
+                  <a:srgbClr val="14181A"/>
                 </a:solidFill>
                 <a:latin typeface="Arial" pitchFamily="34" charset="0"/>
                 <a:ea typeface="Arial" pitchFamily="34" charset="-122"/>
@@ -2243,7 +2243,7 @@
             <a:r>
               <a:rPr lang="en-US" sz="1050" b="1" dirty="0">
                 <a:solidFill>
-                  <a:srgbClr val="5B6475"/>
+                  <a:srgbClr val="575F5C"/>
                 </a:solidFill>
                 <a:latin typeface="Arial" pitchFamily="34" charset="0"/>
                 <a:ea typeface="Arial" pitchFamily="34" charset="-122"/>
@@ -2282,7 +2282,7 @@
             <a:r>
               <a:rPr lang="en-US" sz="1050" b="1" dirty="0">
                 <a:solidFill>
-                  <a:srgbClr val="4636B0"/>
+                  <a:srgbClr val="14181A"/>
                 </a:solidFill>
                 <a:latin typeface="Arial" pitchFamily="34" charset="0"/>
                 <a:ea typeface="Arial" pitchFamily="34" charset="-122"/>
@@ -2311,7 +2311,7 @@
           <a:noFill/>
           <a:ln w="9525">
             <a:solidFill>
-              <a:srgbClr val="E3E6EE"/>
+              <a:srgbClr val="E2E5E1"/>
             </a:solidFill>
             <a:prstDash val="solid"/>
           </a:ln>
@@ -2347,7 +2347,7 @@
             <a:r>
               <a:rPr lang="en-US" sz="1300" dirty="0">
                 <a:solidFill>
-                  <a:srgbClr val="3D4556"/>
+                  <a:srgbClr val="3A423F"/>
                 </a:solidFill>
                 <a:latin typeface="Arial" pitchFamily="34" charset="0"/>
                 <a:ea typeface="Arial" pitchFamily="34" charset="-122"/>
@@ -2389,7 +2389,7 @@
             <a:r>
               <a:rPr lang="en-US" sz="1300" dirty="0">
                 <a:solidFill>
-                  <a:srgbClr val="0B0F19"/>
+                  <a:srgbClr val="14181A"/>
                 </a:solidFill>
                 <a:latin typeface="Arial" pitchFamily="34" charset="0"/>
                 <a:ea typeface="Arial" pitchFamily="34" charset="-122"/>
@@ -2418,7 +2418,7 @@
           <a:noFill/>
           <a:ln w="9525">
             <a:solidFill>
-              <a:srgbClr val="E3E6EE"/>
+              <a:srgbClr val="E2E5E1"/>
             </a:solidFill>
             <a:prstDash val="solid"/>
           </a:ln>
@@ -2454,7 +2454,7 @@
             <a:r>
               <a:rPr lang="en-US" sz="1300" dirty="0">
                 <a:solidFill>
-                  <a:srgbClr val="3D4556"/>
+                  <a:srgbClr val="3A423F"/>
                 </a:solidFill>
                 <a:latin typeface="Arial" pitchFamily="34" charset="0"/>
                 <a:ea typeface="Arial" pitchFamily="34" charset="-122"/>
@@ -2496,7 +2496,7 @@
             <a:r>
               <a:rPr lang="en-US" sz="1300" dirty="0">
                 <a:solidFill>
-                  <a:srgbClr val="0B0F19"/>
+                  <a:srgbClr val="14181A"/>
                 </a:solidFill>
                 <a:latin typeface="Arial" pitchFamily="34" charset="0"/>
                 <a:ea typeface="Arial" pitchFamily="34" charset="-122"/>
@@ -2525,7 +2525,7 @@
           <a:noFill/>
           <a:ln w="9525">
             <a:solidFill>
-              <a:srgbClr val="E3E6EE"/>
+              <a:srgbClr val="E2E5E1"/>
             </a:solidFill>
             <a:prstDash val="solid"/>
           </a:ln>
@@ -2561,7 +2561,7 @@
             <a:r>
               <a:rPr lang="en-US" sz="1300" dirty="0">
                 <a:solidFill>
-                  <a:srgbClr val="3D4556"/>
+                  <a:srgbClr val="3A423F"/>
                 </a:solidFill>
                 <a:latin typeface="Arial" pitchFamily="34" charset="0"/>
                 <a:ea typeface="Arial" pitchFamily="34" charset="-122"/>
@@ -2603,7 +2603,7 @@
             <a:r>
               <a:rPr lang="en-US" sz="1300" dirty="0">
                 <a:solidFill>
-                  <a:srgbClr val="0B0F19"/>
+                  <a:srgbClr val="14181A"/>
                 </a:solidFill>
                 <a:latin typeface="Arial" pitchFamily="34" charset="0"/>
                 <a:ea typeface="Arial" pitchFamily="34" charset="-122"/>
@@ -2632,7 +2632,7 @@
           <a:noFill/>
           <a:ln w="9525">
             <a:solidFill>
-              <a:srgbClr val="E3E6EE"/>
+              <a:srgbClr val="E2E5E1"/>
             </a:solidFill>
             <a:prstDash val="solid"/>
           </a:ln>
@@ -2668,7 +2668,7 @@
             <a:r>
               <a:rPr lang="en-US" sz="1300" dirty="0">
                 <a:solidFill>
-                  <a:srgbClr val="3D4556"/>
+                  <a:srgbClr val="3A423F"/>
                 </a:solidFill>
                 <a:latin typeface="Arial" pitchFamily="34" charset="0"/>
                 <a:ea typeface="Arial" pitchFamily="34" charset="-122"/>
@@ -2710,7 +2710,7 @@
             <a:r>
               <a:rPr lang="en-US" sz="1300" dirty="0">
                 <a:solidFill>
-                  <a:srgbClr val="0B0F19"/>
+                  <a:srgbClr val="14181A"/>
                 </a:solidFill>
                 <a:latin typeface="Arial" pitchFamily="34" charset="0"/>
                 <a:ea typeface="Arial" pitchFamily="34" charset="-122"/>
@@ -2739,7 +2739,7 @@
           <a:noFill/>
           <a:ln w="9525">
             <a:solidFill>
-              <a:srgbClr val="E3E6EE"/>
+              <a:srgbClr val="E2E5E1"/>
             </a:solidFill>
             <a:prstDash val="solid"/>
           </a:ln>
@@ -2775,7 +2775,7 @@
             <a:r>
               <a:rPr lang="en-US" sz="1150" i="1" dirty="0">
                 <a:solidFill>
-                  <a:srgbClr val="5B6475"/>
+                  <a:srgbClr val="575F5C"/>
                 </a:solidFill>
                 <a:latin typeface="Arial" pitchFamily="34" charset="0"/>
                 <a:ea typeface="Arial" pitchFamily="34" charset="-122"/>
@@ -2814,7 +2814,7 @@
             <a:r>
               <a:rPr lang="en-US" sz="900" dirty="0">
                 <a:solidFill>
-                  <a:srgbClr val="5B6475"/>
+                  <a:srgbClr val="575F5C"/>
                 </a:solidFill>
                 <a:latin typeface="Arial" pitchFamily="34" charset="0"/>
                 <a:ea typeface="Arial" pitchFamily="34" charset="-122"/>
@@ -2853,7 +2853,7 @@
             <a:r>
               <a:rPr lang="en-US" sz="900" dirty="0">
                 <a:solidFill>
-                  <a:srgbClr val="5B6475"/>
+                  <a:srgbClr val="575F5C"/>
                 </a:solidFill>
                 <a:latin typeface="Arial" pitchFamily="34" charset="0"/>
                 <a:ea typeface="Arial" pitchFamily="34" charset="-122"/>
@@ -2948,7 +2948,7 @@
             <a:r>
               <a:rPr lang="en-US" sz="2400" b="1" dirty="0">
                 <a:solidFill>
-                  <a:srgbClr val="0B0F19"/>
+                  <a:srgbClr val="14181A"/>
                 </a:solidFill>
                 <a:latin typeface="Arial" pitchFamily="34" charset="0"/>
                 <a:ea typeface="Arial" pitchFamily="34" charset="-122"/>
@@ -2969,17 +2969,17 @@
         <p:spPr>
           <a:xfrm>
             <a:off x="731520" y="1481328"/>
-            <a:ext cx="2377440" cy="25603"/>
+            <a:ext cx="2011680" cy="20117"/>
           </a:xfrm>
           <a:prstGeom prst="rect">
             <a:avLst/>
           </a:prstGeom>
           <a:solidFill>
-            <a:srgbClr val="38C9FF"/>
+            <a:srgbClr val="14181A"/>
           </a:solidFill>
           <a:ln w="12700">
             <a:solidFill>
-              <a:srgbClr val="38C9FF"/>
+              <a:srgbClr val="14181A"/>
             </a:solidFill>
             <a:prstDash val="solid"/>
           </a:ln>
@@ -3015,7 +3015,7 @@
             <a:r>
               <a:rPr lang="en-US" sz="3600" b="1" dirty="0">
                 <a:solidFill>
-                  <a:srgbClr val="4636B0"/>
+                  <a:srgbClr val="14181A"/>
                 </a:solidFill>
                 <a:latin typeface="Arial" pitchFamily="34" charset="0"/>
                 <a:ea typeface="Arial" pitchFamily="34" charset="-122"/>
@@ -3057,7 +3057,7 @@
             <a:r>
               <a:rPr lang="en-US" sz="1450" dirty="0">
                 <a:solidFill>
-                  <a:srgbClr val="3D4556"/>
+                  <a:srgbClr val="3A423F"/>
                 </a:solidFill>
                 <a:latin typeface="Arial" pitchFamily="34" charset="0"/>
                 <a:ea typeface="Arial" pitchFamily="34" charset="-122"/>
@@ -3096,7 +3096,7 @@
             <a:r>
               <a:rPr lang="en-US" sz="1500" b="1" dirty="0">
                 <a:solidFill>
-                  <a:srgbClr val="4636B0"/>
+                  <a:srgbClr val="14181A"/>
                 </a:solidFill>
                 <a:latin typeface="Arial" pitchFamily="34" charset="0"/>
                 <a:ea typeface="Arial" pitchFamily="34" charset="-122"/>
@@ -3135,7 +3135,7 @@
             <a:r>
               <a:rPr lang="en-US" sz="1050" dirty="0">
                 <a:solidFill>
-                  <a:srgbClr val="5B6475"/>
+                  <a:srgbClr val="575F5C"/>
                 </a:solidFill>
                 <a:latin typeface="Arial" pitchFamily="34" charset="0"/>
                 <a:ea typeface="Arial" pitchFamily="34" charset="-122"/>
@@ -3230,7 +3230,7 @@
             <a:r>
               <a:rPr lang="en-US" sz="1600" b="1" dirty="0">
                 <a:solidFill>
-                  <a:srgbClr val="0B0F19"/>
+                  <a:srgbClr val="14181A"/>
                 </a:solidFill>
                 <a:latin typeface="Arial" pitchFamily="34" charset="0"/>
                 <a:ea typeface="Arial" pitchFamily="34" charset="-122"/>
@@ -3269,7 +3269,7 @@
             <a:r>
               <a:rPr lang="en-US" sz="1000" dirty="0">
                 <a:solidFill>
-                  <a:srgbClr val="5B6475"/>
+                  <a:srgbClr val="575F5C"/>
                 </a:solidFill>
                 <a:latin typeface="Arial" pitchFamily="34" charset="0"/>
                 <a:ea typeface="Arial" pitchFamily="34" charset="-122"/>
@@ -3290,17 +3290,17 @@
         <p:spPr>
           <a:xfrm>
             <a:off x="731520" y="877824"/>
-            <a:ext cx="10725912" cy="25603"/>
+            <a:ext cx="10725912" cy="10973"/>
           </a:xfrm>
           <a:prstGeom prst="rect">
             <a:avLst/>
           </a:prstGeom>
           <a:solidFill>
-            <a:srgbClr val="38C9FF"/>
+            <a:srgbClr val="E2E5E1"/>
           </a:solidFill>
           <a:ln w="12700">
             <a:solidFill>
-              <a:srgbClr val="38C9FF"/>
+              <a:srgbClr val="E2E5E1"/>
             </a:solidFill>
             <a:prstDash val="solid"/>
           </a:ln>
@@ -3336,7 +3336,7 @@
             <a:r>
               <a:rPr lang="en-US" sz="2600" b="1" dirty="0">
                 <a:solidFill>
-                  <a:srgbClr val="4636B0"/>
+                  <a:srgbClr val="14181A"/>
                 </a:solidFill>
                 <a:latin typeface="Arial" pitchFamily="34" charset="0"/>
                 <a:ea typeface="Arial" pitchFamily="34" charset="-122"/>
@@ -3378,7 +3378,7 @@
             <a:r>
               <a:rPr lang="en-US" sz="1250" i="1" dirty="0">
                 <a:solidFill>
-                  <a:srgbClr val="5B6475"/>
+                  <a:srgbClr val="575F5C"/>
                 </a:solidFill>
                 <a:latin typeface="Arial" pitchFamily="34" charset="0"/>
                 <a:ea typeface="Arial" pitchFamily="34" charset="-122"/>
@@ -3423,7 +3423,7 @@
             <a:r>
               <a:rPr lang="en-US" sz="1300" b="1" dirty="0">
                 <a:solidFill>
-                  <a:srgbClr val="0B0F19"/>
+                  <a:srgbClr val="14181A"/>
                 </a:solidFill>
                 <a:latin typeface="Arial" pitchFamily="34" charset="0"/>
                 <a:ea typeface="Arial" pitchFamily="34" charset="-122"/>
@@ -3443,7 +3443,7 @@
             <a:r>
               <a:rPr lang="en-US" sz="1300" dirty="0">
                 <a:solidFill>
-                  <a:srgbClr val="3D4556"/>
+                  <a:srgbClr val="3A423F"/>
                 </a:solidFill>
                 <a:latin typeface="Arial" pitchFamily="34" charset="0"/>
                 <a:ea typeface="Arial" pitchFamily="34" charset="-122"/>
@@ -3466,7 +3466,7 @@
             <a:r>
               <a:rPr lang="en-US" sz="1300" b="1" dirty="0">
                 <a:solidFill>
-                  <a:srgbClr val="0B0F19"/>
+                  <a:srgbClr val="14181A"/>
                 </a:solidFill>
                 <a:latin typeface="Arial" pitchFamily="34" charset="0"/>
                 <a:ea typeface="Arial" pitchFamily="34" charset="-122"/>
@@ -3486,7 +3486,7 @@
             <a:r>
               <a:rPr lang="en-US" sz="1300" dirty="0">
                 <a:solidFill>
-                  <a:srgbClr val="3D4556"/>
+                  <a:srgbClr val="3A423F"/>
                 </a:solidFill>
                 <a:latin typeface="Arial" pitchFamily="34" charset="0"/>
                 <a:ea typeface="Arial" pitchFamily="34" charset="-122"/>
@@ -3509,7 +3509,7 @@
             <a:r>
               <a:rPr lang="en-US" sz="1300" b="1" dirty="0">
                 <a:solidFill>
-                  <a:srgbClr val="0B0F19"/>
+                  <a:srgbClr val="14181A"/>
                 </a:solidFill>
                 <a:latin typeface="Arial" pitchFamily="34" charset="0"/>
                 <a:ea typeface="Arial" pitchFamily="34" charset="-122"/>
@@ -3529,7 +3529,7 @@
             <a:r>
               <a:rPr lang="en-US" sz="1300" dirty="0">
                 <a:solidFill>
-                  <a:srgbClr val="3D4556"/>
+                  <a:srgbClr val="3A423F"/>
                 </a:solidFill>
                 <a:latin typeface="Arial" pitchFamily="34" charset="0"/>
                 <a:ea typeface="Arial" pitchFamily="34" charset="-122"/>
@@ -3552,7 +3552,7 @@
             <a:r>
               <a:rPr lang="en-US" sz="1300" b="1" dirty="0">
                 <a:solidFill>
-                  <a:srgbClr val="0B0F19"/>
+                  <a:srgbClr val="14181A"/>
                 </a:solidFill>
                 <a:latin typeface="Arial" pitchFamily="34" charset="0"/>
                 <a:ea typeface="Arial" pitchFamily="34" charset="-122"/>
@@ -3572,7 +3572,7 @@
             <a:r>
               <a:rPr lang="en-US" sz="1300" dirty="0">
                 <a:solidFill>
-                  <a:srgbClr val="3D4556"/>
+                  <a:srgbClr val="3A423F"/>
                 </a:solidFill>
                 <a:latin typeface="Arial" pitchFamily="34" charset="0"/>
                 <a:ea typeface="Arial" pitchFamily="34" charset="-122"/>
@@ -3611,7 +3611,7 @@
             <a:r>
               <a:rPr lang="en-US" sz="900" dirty="0">
                 <a:solidFill>
-                  <a:srgbClr val="5B6475"/>
+                  <a:srgbClr val="575F5C"/>
                 </a:solidFill>
                 <a:latin typeface="Arial" pitchFamily="34" charset="0"/>
                 <a:ea typeface="Arial" pitchFamily="34" charset="-122"/>
@@ -3650,7 +3650,7 @@
             <a:r>
               <a:rPr lang="en-US" sz="900" dirty="0">
                 <a:solidFill>
-                  <a:srgbClr val="5B6475"/>
+                  <a:srgbClr val="575F5C"/>
                 </a:solidFill>
                 <a:latin typeface="Arial" pitchFamily="34" charset="0"/>
                 <a:ea typeface="Arial" pitchFamily="34" charset="-122"/>
@@ -3745,7 +3745,7 @@
             <a:r>
               <a:rPr lang="en-US" sz="1600" b="1" dirty="0">
                 <a:solidFill>
-                  <a:srgbClr val="0B0F19"/>
+                  <a:srgbClr val="14181A"/>
                 </a:solidFill>
                 <a:latin typeface="Arial" pitchFamily="34" charset="0"/>
                 <a:ea typeface="Arial" pitchFamily="34" charset="-122"/>
@@ -3784,7 +3784,7 @@
             <a:r>
               <a:rPr lang="en-US" sz="1000" dirty="0">
                 <a:solidFill>
-                  <a:srgbClr val="5B6475"/>
+                  <a:srgbClr val="575F5C"/>
                 </a:solidFill>
                 <a:latin typeface="Arial" pitchFamily="34" charset="0"/>
                 <a:ea typeface="Arial" pitchFamily="34" charset="-122"/>
@@ -3805,17 +3805,17 @@
         <p:spPr>
           <a:xfrm>
             <a:off x="731520" y="877824"/>
-            <a:ext cx="10725912" cy="25603"/>
+            <a:ext cx="10725912" cy="10973"/>
           </a:xfrm>
           <a:prstGeom prst="rect">
             <a:avLst/>
           </a:prstGeom>
           <a:solidFill>
-            <a:srgbClr val="38C9FF"/>
+            <a:srgbClr val="E2E5E1"/>
           </a:solidFill>
           <a:ln w="12700">
             <a:solidFill>
-              <a:srgbClr val="38C9FF"/>
+              <a:srgbClr val="E2E5E1"/>
             </a:solidFill>
             <a:prstDash val="solid"/>
           </a:ln>
@@ -3851,7 +3851,7 @@
             <a:r>
               <a:rPr lang="en-US" sz="2600" b="1" dirty="0">
                 <a:solidFill>
-                  <a:srgbClr val="4636B0"/>
+                  <a:srgbClr val="14181A"/>
                 </a:solidFill>
                 <a:latin typeface="Arial" pitchFamily="34" charset="0"/>
                 <a:ea typeface="Arial" pitchFamily="34" charset="-122"/>
@@ -3893,7 +3893,7 @@
             <a:r>
               <a:rPr lang="en-US" sz="1150" dirty="0">
                 <a:solidFill>
-                  <a:srgbClr val="5B6475"/>
+                  <a:srgbClr val="575F5C"/>
                 </a:solidFill>
                 <a:latin typeface="Arial" pitchFamily="34" charset="0"/>
                 <a:ea typeface="Arial" pitchFamily="34" charset="-122"/>
@@ -3918,15 +3918,15 @@
           </a:xfrm>
           <a:prstGeom prst="roundRect">
             <a:avLst>
-              <a:gd name="adj" fmla="val 3223"/>
+              <a:gd name="adj" fmla="val 1074"/>
             </a:avLst>
           </a:prstGeom>
           <a:solidFill>
-            <a:srgbClr val="FFFFFF"/>
+            <a:srgbClr val="F2F3F1"/>
           </a:solidFill>
           <a:ln w="12700">
             <a:solidFill>
-              <a:srgbClr val="E3E6EE"/>
+              <a:srgbClr val="F2F3F1"/>
             </a:solidFill>
             <a:prstDash val="solid"/>
           </a:ln>
@@ -3959,7 +3959,7 @@
             <a:r>
               <a:rPr lang="en-US" sz="1800" b="1" dirty="0">
                 <a:solidFill>
-                  <a:srgbClr val="0B0F19"/>
+                  <a:srgbClr val="14181A"/>
                 </a:solidFill>
                 <a:latin typeface="Arial" pitchFamily="34" charset="0"/>
                 <a:ea typeface="Arial" pitchFamily="34" charset="-122"/>
@@ -3998,13 +3998,13 @@
             <a:r>
               <a:rPr lang="en-US" sz="1100" b="1" dirty="0">
                 <a:solidFill>
-                  <a:srgbClr val="6366F1"/>
-                </a:solidFill>
-                <a:latin typeface="Arial" pitchFamily="34" charset="0"/>
-                <a:ea typeface="Arial" pitchFamily="34" charset="-122"/>
-                <a:cs typeface="Arial" pitchFamily="34" charset="-120"/>
-              </a:rPr>
-              <a:t>2 appareils</a:t>
+                  <a:srgbClr val="1E4D3B"/>
+                </a:solidFill>
+                <a:latin typeface="Arial" pitchFamily="34" charset="0"/>
+                <a:ea typeface="Arial" pitchFamily="34" charset="-122"/>
+                <a:cs typeface="Arial" pitchFamily="34" charset="-120"/>
+              </a:rPr>
+              <a:t>Jusqu’à 2 appareils</a:t>
             </a:r>
             <a:endParaRPr lang="en-US" sz="1100" dirty="0"/>
           </a:p>
@@ -4040,7 +4040,7 @@
             <a:r>
               <a:rPr lang="en-US" sz="1000" dirty="0">
                 <a:solidFill>
-                  <a:srgbClr val="5B6475"/>
+                  <a:srgbClr val="575F5C"/>
                 </a:solidFill>
                 <a:latin typeface="Arial" pitchFamily="34" charset="0"/>
                 <a:ea typeface="Arial" pitchFamily="34" charset="-122"/>
@@ -4079,7 +4079,7 @@
             <a:r>
               <a:rPr lang="en-US" sz="2600" b="1" dirty="0">
                 <a:solidFill>
-                  <a:srgbClr val="4636B0"/>
+                  <a:srgbClr val="14181A"/>
                 </a:solidFill>
                 <a:latin typeface="Arial" pitchFamily="34" charset="0"/>
                 <a:ea typeface="Arial" pitchFamily="34" charset="-122"/>
@@ -4093,7 +4093,7 @@
             <a:r>
               <a:rPr lang="en-US" sz="1050" dirty="0">
                 <a:solidFill>
-                  <a:srgbClr val="5B6475"/>
+                  <a:srgbClr val="575F5C"/>
                 </a:solidFill>
                 <a:latin typeface="Arial" pitchFamily="34" charset="0"/>
                 <a:ea typeface="Arial" pitchFamily="34" charset="-122"/>
@@ -4132,7 +4132,7 @@
             <a:r>
               <a:rPr lang="en-US" sz="950" dirty="0">
                 <a:solidFill>
-                  <a:srgbClr val="1F7A5C"/>
+                  <a:srgbClr val="15704F"/>
                 </a:solidFill>
                 <a:latin typeface="Arial" pitchFamily="34" charset="0"/>
                 <a:ea typeface="Arial" pitchFamily="34" charset="-122"/>
@@ -4161,7 +4161,7 @@
           <a:noFill/>
           <a:ln w="9525">
             <a:solidFill>
-              <a:srgbClr val="E3E6EE"/>
+              <a:srgbClr val="E2E5E1"/>
             </a:solidFill>
             <a:prstDash val="solid"/>
           </a:ln>
@@ -4201,13 +4201,13 @@
             <a:r>
               <a:rPr lang="en-US" sz="950" dirty="0">
                 <a:solidFill>
-                  <a:srgbClr val="3D4556"/>
-                </a:solidFill>
-                <a:latin typeface="Arial" pitchFamily="34" charset="0"/>
-                <a:ea typeface="Arial" pitchFamily="34" charset="-122"/>
-                <a:cs typeface="Arial" pitchFamily="34" charset="-120"/>
-              </a:rPr>
-              <a:t>Un magasin, deux comptes</a:t>
+                  <a:srgbClr val="3A423F"/>
+                </a:solidFill>
+                <a:latin typeface="Arial" pitchFamily="34" charset="0"/>
+                <a:ea typeface="Arial" pitchFamily="34" charset="-122"/>
+                <a:cs typeface="Arial" pitchFamily="34" charset="-120"/>
+              </a:rPr>
+              <a:t>Un magasin, deux appareils à la fois — comptes illimités</a:t>
             </a:r>
             <a:endParaRPr lang="en-US" sz="950" dirty="0"/>
           </a:p>
@@ -4225,7 +4225,7 @@
             <a:r>
               <a:rPr lang="en-US" sz="950" dirty="0">
                 <a:solidFill>
-                  <a:srgbClr val="3D4556"/>
+                  <a:srgbClr val="3A423F"/>
                 </a:solidFill>
                 <a:latin typeface="Arial" pitchFamily="34" charset="0"/>
                 <a:ea typeface="Arial" pitchFamily="34" charset="-122"/>
@@ -4249,7 +4249,7 @@
             <a:r>
               <a:rPr lang="en-US" sz="950" dirty="0">
                 <a:solidFill>
-                  <a:srgbClr val="3D4556"/>
+                  <a:srgbClr val="3A423F"/>
                 </a:solidFill>
                 <a:latin typeface="Arial" pitchFamily="34" charset="0"/>
                 <a:ea typeface="Arial" pitchFamily="34" charset="-122"/>
@@ -4273,7 +4273,7 @@
             <a:r>
               <a:rPr lang="en-US" sz="950" dirty="0">
                 <a:solidFill>
-                  <a:srgbClr val="3D4556"/>
+                  <a:srgbClr val="3A423F"/>
                 </a:solidFill>
                 <a:latin typeface="Arial" pitchFamily="34" charset="0"/>
                 <a:ea typeface="Arial" pitchFamily="34" charset="-122"/>
@@ -4297,7 +4297,7 @@
             <a:r>
               <a:rPr lang="en-US" sz="950" dirty="0">
                 <a:solidFill>
-                  <a:srgbClr val="3D4556"/>
+                  <a:srgbClr val="3A423F"/>
                 </a:solidFill>
                 <a:latin typeface="Arial" pitchFamily="34" charset="0"/>
                 <a:ea typeface="Arial" pitchFamily="34" charset="-122"/>
@@ -4322,15 +4322,15 @@
           </a:xfrm>
           <a:prstGeom prst="roundRect">
             <a:avLst>
-              <a:gd name="adj" fmla="val 3223"/>
+              <a:gd name="adj" fmla="val 1074"/>
             </a:avLst>
           </a:prstGeom>
           <a:solidFill>
-            <a:srgbClr val="EEEEFC"/>
+            <a:srgbClr val="E7EDE9"/>
           </a:solidFill>
-          <a:ln w="19050">
+          <a:ln w="15875">
             <a:solidFill>
-              <a:srgbClr val="6366F1"/>
+              <a:srgbClr val="1E4D3B"/>
             </a:solidFill>
             <a:prstDash val="solid"/>
           </a:ln>
@@ -4363,7 +4363,7 @@
             <a:r>
               <a:rPr lang="en-US" sz="800" b="1" spc="60" kern="0" dirty="0">
                 <a:solidFill>
-                  <a:srgbClr val="6366F1"/>
+                  <a:srgbClr val="1E4D3B"/>
                 </a:solidFill>
                 <a:latin typeface="Arial" pitchFamily="34" charset="0"/>
                 <a:ea typeface="Arial" pitchFamily="34" charset="-122"/>
@@ -4402,7 +4402,7 @@
             <a:r>
               <a:rPr lang="en-US" sz="1800" b="1" dirty="0">
                 <a:solidFill>
-                  <a:srgbClr val="0B0F19"/>
+                  <a:srgbClr val="14181A"/>
                 </a:solidFill>
                 <a:latin typeface="Arial" pitchFamily="34" charset="0"/>
                 <a:ea typeface="Arial" pitchFamily="34" charset="-122"/>
@@ -4441,13 +4441,13 @@
             <a:r>
               <a:rPr lang="en-US" sz="1100" b="1" dirty="0">
                 <a:solidFill>
-                  <a:srgbClr val="6366F1"/>
-                </a:solidFill>
-                <a:latin typeface="Arial" pitchFamily="34" charset="0"/>
-                <a:ea typeface="Arial" pitchFamily="34" charset="-122"/>
-                <a:cs typeface="Arial" pitchFamily="34" charset="-120"/>
-              </a:rPr>
-              <a:t>3 à 20 appareils</a:t>
+                  <a:srgbClr val="1E4D3B"/>
+                </a:solidFill>
+                <a:latin typeface="Arial" pitchFamily="34" charset="0"/>
+                <a:ea typeface="Arial" pitchFamily="34" charset="-122"/>
+                <a:cs typeface="Arial" pitchFamily="34" charset="-120"/>
+              </a:rPr>
+              <a:t>Jusqu’à 20 appareils</a:t>
             </a:r>
             <a:endParaRPr lang="en-US" sz="1100" dirty="0"/>
           </a:p>
@@ -4483,7 +4483,7 @@
             <a:r>
               <a:rPr lang="en-US" sz="1000" dirty="0">
                 <a:solidFill>
-                  <a:srgbClr val="5B6475"/>
+                  <a:srgbClr val="575F5C"/>
                 </a:solidFill>
                 <a:latin typeface="Arial" pitchFamily="34" charset="0"/>
                 <a:ea typeface="Arial" pitchFamily="34" charset="-122"/>
@@ -4522,7 +4522,7 @@
             <a:r>
               <a:rPr lang="en-US" sz="2600" b="1" dirty="0">
                 <a:solidFill>
-                  <a:srgbClr val="4636B0"/>
+                  <a:srgbClr val="14181A"/>
                 </a:solidFill>
                 <a:latin typeface="Arial" pitchFamily="34" charset="0"/>
                 <a:ea typeface="Arial" pitchFamily="34" charset="-122"/>
@@ -4536,7 +4536,7 @@
             <a:r>
               <a:rPr lang="en-US" sz="1050" dirty="0">
                 <a:solidFill>
-                  <a:srgbClr val="5B6475"/>
+                  <a:srgbClr val="575F5C"/>
                 </a:solidFill>
                 <a:latin typeface="Arial" pitchFamily="34" charset="0"/>
                 <a:ea typeface="Arial" pitchFamily="34" charset="-122"/>
@@ -4575,7 +4575,7 @@
             <a:r>
               <a:rPr lang="en-US" sz="950" dirty="0">
                 <a:solidFill>
-                  <a:srgbClr val="1F7A5C"/>
+                  <a:srgbClr val="15704F"/>
                 </a:solidFill>
                 <a:latin typeface="Arial" pitchFamily="34" charset="0"/>
                 <a:ea typeface="Arial" pitchFamily="34" charset="-122"/>
@@ -4604,7 +4604,7 @@
           <a:noFill/>
           <a:ln w="9525">
             <a:solidFill>
-              <a:srgbClr val="E3E6EE"/>
+              <a:srgbClr val="E2E5E1"/>
             </a:solidFill>
             <a:prstDash val="solid"/>
           </a:ln>
@@ -4644,7 +4644,7 @@
             <a:r>
               <a:rPr lang="en-US" sz="950" dirty="0">
                 <a:solidFill>
-                  <a:srgbClr val="3D4556"/>
+                  <a:srgbClr val="3A423F"/>
                 </a:solidFill>
                 <a:latin typeface="Arial" pitchFamily="34" charset="0"/>
                 <a:ea typeface="Arial" pitchFamily="34" charset="-122"/>
@@ -4668,7 +4668,7 @@
             <a:r>
               <a:rPr lang="en-US" sz="950" dirty="0">
                 <a:solidFill>
-                  <a:srgbClr val="3D4556"/>
+                  <a:srgbClr val="3A423F"/>
                 </a:solidFill>
                 <a:latin typeface="Arial" pitchFamily="34" charset="0"/>
                 <a:ea typeface="Arial" pitchFamily="34" charset="-122"/>
@@ -4692,7 +4692,7 @@
             <a:r>
               <a:rPr lang="en-US" sz="950" dirty="0">
                 <a:solidFill>
-                  <a:srgbClr val="3D4556"/>
+                  <a:srgbClr val="3A423F"/>
                 </a:solidFill>
                 <a:latin typeface="Arial" pitchFamily="34" charset="0"/>
                 <a:ea typeface="Arial" pitchFamily="34" charset="-122"/>
@@ -4716,7 +4716,7 @@
             <a:r>
               <a:rPr lang="en-US" sz="950" dirty="0">
                 <a:solidFill>
-                  <a:srgbClr val="3D4556"/>
+                  <a:srgbClr val="3A423F"/>
                 </a:solidFill>
                 <a:latin typeface="Arial" pitchFamily="34" charset="0"/>
                 <a:ea typeface="Arial" pitchFamily="34" charset="-122"/>
@@ -4740,7 +4740,7 @@
             <a:r>
               <a:rPr lang="en-US" sz="950" dirty="0">
                 <a:solidFill>
-                  <a:srgbClr val="3D4556"/>
+                  <a:srgbClr val="3A423F"/>
                 </a:solidFill>
                 <a:latin typeface="Arial" pitchFamily="34" charset="0"/>
                 <a:ea typeface="Arial" pitchFamily="34" charset="-122"/>
@@ -4765,15 +4765,15 @@
           </a:xfrm>
           <a:prstGeom prst="roundRect">
             <a:avLst>
-              <a:gd name="adj" fmla="val 3223"/>
+              <a:gd name="adj" fmla="val 1074"/>
             </a:avLst>
           </a:prstGeom>
           <a:solidFill>
-            <a:srgbClr val="FFFFFF"/>
+            <a:srgbClr val="F2F3F1"/>
           </a:solidFill>
           <a:ln w="12700">
             <a:solidFill>
-              <a:srgbClr val="E3E6EE"/>
+              <a:srgbClr val="F2F3F1"/>
             </a:solidFill>
             <a:prstDash val="solid"/>
           </a:ln>
@@ -4806,7 +4806,7 @@
             <a:r>
               <a:rPr lang="en-US" sz="1800" b="1" dirty="0">
                 <a:solidFill>
-                  <a:srgbClr val="0B0F19"/>
+                  <a:srgbClr val="14181A"/>
                 </a:solidFill>
                 <a:latin typeface="Arial" pitchFamily="34" charset="0"/>
                 <a:ea typeface="Arial" pitchFamily="34" charset="-122"/>
@@ -4845,13 +4845,13 @@
             <a:r>
               <a:rPr lang="en-US" sz="1100" b="1" dirty="0">
                 <a:solidFill>
-                  <a:srgbClr val="6366F1"/>
-                </a:solidFill>
-                <a:latin typeface="Arial" pitchFamily="34" charset="0"/>
-                <a:ea typeface="Arial" pitchFamily="34" charset="-122"/>
-                <a:cs typeface="Arial" pitchFamily="34" charset="-120"/>
-              </a:rPr>
-              <a:t>21 à 100 appareils</a:t>
+                  <a:srgbClr val="1E4D3B"/>
+                </a:solidFill>
+                <a:latin typeface="Arial" pitchFamily="34" charset="0"/>
+                <a:ea typeface="Arial" pitchFamily="34" charset="-122"/>
+                <a:cs typeface="Arial" pitchFamily="34" charset="-120"/>
+              </a:rPr>
+              <a:t>Jusqu’à 100 appareils</a:t>
             </a:r>
             <a:endParaRPr lang="en-US" sz="1100" dirty="0"/>
           </a:p>
@@ -4887,7 +4887,7 @@
             <a:r>
               <a:rPr lang="en-US" sz="1000" dirty="0">
                 <a:solidFill>
-                  <a:srgbClr val="5B6475"/>
+                  <a:srgbClr val="575F5C"/>
                 </a:solidFill>
                 <a:latin typeface="Arial" pitchFamily="34" charset="0"/>
                 <a:ea typeface="Arial" pitchFamily="34" charset="-122"/>
@@ -4926,7 +4926,7 @@
             <a:r>
               <a:rPr lang="en-US" sz="2600" b="1" dirty="0">
                 <a:solidFill>
-                  <a:srgbClr val="4636B0"/>
+                  <a:srgbClr val="14181A"/>
                 </a:solidFill>
                 <a:latin typeface="Arial" pitchFamily="34" charset="0"/>
                 <a:ea typeface="Arial" pitchFamily="34" charset="-122"/>
@@ -4940,7 +4940,7 @@
             <a:r>
               <a:rPr lang="en-US" sz="1050" dirty="0">
                 <a:solidFill>
-                  <a:srgbClr val="5B6475"/>
+                  <a:srgbClr val="575F5C"/>
                 </a:solidFill>
                 <a:latin typeface="Arial" pitchFamily="34" charset="0"/>
                 <a:ea typeface="Arial" pitchFamily="34" charset="-122"/>
@@ -4979,7 +4979,7 @@
             <a:r>
               <a:rPr lang="en-US" sz="950" dirty="0">
                 <a:solidFill>
-                  <a:srgbClr val="1F7A5C"/>
+                  <a:srgbClr val="15704F"/>
                 </a:solidFill>
                 <a:latin typeface="Arial" pitchFamily="34" charset="0"/>
                 <a:ea typeface="Arial" pitchFamily="34" charset="-122"/>
@@ -5008,7 +5008,7 @@
           <a:noFill/>
           <a:ln w="9525">
             <a:solidFill>
-              <a:srgbClr val="E3E6EE"/>
+              <a:srgbClr val="E2E5E1"/>
             </a:solidFill>
             <a:prstDash val="solid"/>
           </a:ln>
@@ -5048,7 +5048,7 @@
             <a:r>
               <a:rPr lang="en-US" sz="950" dirty="0">
                 <a:solidFill>
-                  <a:srgbClr val="3D4556"/>
+                  <a:srgbClr val="3A423F"/>
                 </a:solidFill>
                 <a:latin typeface="Arial" pitchFamily="34" charset="0"/>
                 <a:ea typeface="Arial" pitchFamily="34" charset="-122"/>
@@ -5072,7 +5072,7 @@
             <a:r>
               <a:rPr lang="en-US" sz="950" dirty="0">
                 <a:solidFill>
-                  <a:srgbClr val="3D4556"/>
+                  <a:srgbClr val="3A423F"/>
                 </a:solidFill>
                 <a:latin typeface="Arial" pitchFamily="34" charset="0"/>
                 <a:ea typeface="Arial" pitchFamily="34" charset="-122"/>
@@ -5096,7 +5096,7 @@
             <a:r>
               <a:rPr lang="en-US" sz="950" dirty="0">
                 <a:solidFill>
-                  <a:srgbClr val="3D4556"/>
+                  <a:srgbClr val="3A423F"/>
                 </a:solidFill>
                 <a:latin typeface="Arial" pitchFamily="34" charset="0"/>
                 <a:ea typeface="Arial" pitchFamily="34" charset="-122"/>
@@ -5120,7 +5120,7 @@
             <a:r>
               <a:rPr lang="en-US" sz="950" dirty="0">
                 <a:solidFill>
-                  <a:srgbClr val="3D4556"/>
+                  <a:srgbClr val="3A423F"/>
                 </a:solidFill>
                 <a:latin typeface="Arial" pitchFamily="34" charset="0"/>
                 <a:ea typeface="Arial" pitchFamily="34" charset="-122"/>
@@ -5144,7 +5144,7 @@
             <a:r>
               <a:rPr lang="en-US" sz="950" dirty="0">
                 <a:solidFill>
-                  <a:srgbClr val="3D4556"/>
+                  <a:srgbClr val="3A423F"/>
                 </a:solidFill>
                 <a:latin typeface="Arial" pitchFamily="34" charset="0"/>
                 <a:ea typeface="Arial" pitchFamily="34" charset="-122"/>
@@ -5186,7 +5186,7 @@
             <a:r>
               <a:rPr lang="en-US" sz="1100" i="1" dirty="0">
                 <a:solidFill>
-                  <a:srgbClr val="5B6475"/>
+                  <a:srgbClr val="575F5C"/>
                 </a:solidFill>
                 <a:latin typeface="Arial" pitchFamily="34" charset="0"/>
                 <a:ea typeface="Arial" pitchFamily="34" charset="-122"/>
@@ -5225,7 +5225,7 @@
             <a:r>
               <a:rPr lang="en-US" sz="900" dirty="0">
                 <a:solidFill>
-                  <a:srgbClr val="5B6475"/>
+                  <a:srgbClr val="575F5C"/>
                 </a:solidFill>
                 <a:latin typeface="Arial" pitchFamily="34" charset="0"/>
                 <a:ea typeface="Arial" pitchFamily="34" charset="-122"/>
@@ -5264,7 +5264,7 @@
             <a:r>
               <a:rPr lang="en-US" sz="900" dirty="0">
                 <a:solidFill>
-                  <a:srgbClr val="5B6475"/>
+                  <a:srgbClr val="575F5C"/>
                 </a:solidFill>
                 <a:latin typeface="Arial" pitchFamily="34" charset="0"/>
                 <a:ea typeface="Arial" pitchFamily="34" charset="-122"/>
@@ -5359,7 +5359,7 @@
             <a:r>
               <a:rPr lang="en-US" sz="1600" b="1" dirty="0">
                 <a:solidFill>
-                  <a:srgbClr val="0B0F19"/>
+                  <a:srgbClr val="14181A"/>
                 </a:solidFill>
                 <a:latin typeface="Arial" pitchFamily="34" charset="0"/>
                 <a:ea typeface="Arial" pitchFamily="34" charset="-122"/>
@@ -5398,7 +5398,7 @@
             <a:r>
               <a:rPr lang="en-US" sz="1000" dirty="0">
                 <a:solidFill>
-                  <a:srgbClr val="5B6475"/>
+                  <a:srgbClr val="575F5C"/>
                 </a:solidFill>
                 <a:latin typeface="Arial" pitchFamily="34" charset="0"/>
                 <a:ea typeface="Arial" pitchFamily="34" charset="-122"/>
@@ -5419,17 +5419,17 @@
         <p:spPr>
           <a:xfrm>
             <a:off x="731520" y="877824"/>
-            <a:ext cx="10725912" cy="25603"/>
+            <a:ext cx="10725912" cy="10973"/>
           </a:xfrm>
           <a:prstGeom prst="rect">
             <a:avLst/>
           </a:prstGeom>
           <a:solidFill>
-            <a:srgbClr val="38C9FF"/>
+            <a:srgbClr val="E2E5E1"/>
           </a:solidFill>
           <a:ln w="12700">
             <a:solidFill>
-              <a:srgbClr val="38C9FF"/>
+              <a:srgbClr val="E2E5E1"/>
             </a:solidFill>
             <a:prstDash val="solid"/>
           </a:ln>
@@ -5465,7 +5465,7 @@
             <a:r>
               <a:rPr lang="en-US" sz="2500" b="1" dirty="0">
                 <a:solidFill>
-                  <a:srgbClr val="4636B0"/>
+                  <a:srgbClr val="14181A"/>
                 </a:solidFill>
                 <a:latin typeface="Arial" pitchFamily="34" charset="0"/>
                 <a:ea typeface="Arial" pitchFamily="34" charset="-122"/>
@@ -5510,7 +5510,7 @@
             <a:r>
               <a:rPr lang="en-US" sz="1250" dirty="0">
                 <a:solidFill>
-                  <a:srgbClr val="3D4556"/>
+                  <a:srgbClr val="3A423F"/>
                 </a:solidFill>
                 <a:latin typeface="Arial" pitchFamily="34" charset="0"/>
                 <a:ea typeface="Arial" pitchFamily="34" charset="-122"/>
@@ -5533,7 +5533,7 @@
             <a:r>
               <a:rPr lang="en-US" sz="1250" dirty="0">
                 <a:solidFill>
-                  <a:srgbClr val="3D4556"/>
+                  <a:srgbClr val="3A423F"/>
                 </a:solidFill>
                 <a:latin typeface="Arial" pitchFamily="34" charset="0"/>
                 <a:ea typeface="Arial" pitchFamily="34" charset="-122"/>
@@ -5556,7 +5556,7 @@
             <a:r>
               <a:rPr lang="en-US" sz="1250" dirty="0">
                 <a:solidFill>
-                  <a:srgbClr val="3D4556"/>
+                  <a:srgbClr val="3A423F"/>
                 </a:solidFill>
                 <a:latin typeface="Arial" pitchFamily="34" charset="0"/>
                 <a:ea typeface="Arial" pitchFamily="34" charset="-122"/>
@@ -5581,7 +5581,7 @@
           </a:xfrm>
           <a:prstGeom prst="roundRect">
             <a:avLst>
-              <a:gd name="adj" fmla="val 1594"/>
+              <a:gd name="adj" fmla="val 797"/>
             </a:avLst>
           </a:prstGeom>
           <a:solidFill>
@@ -5589,7 +5589,7 @@
           </a:solidFill>
           <a:ln w="12700">
             <a:solidFill>
-              <a:srgbClr val="E3E6EE"/>
+              <a:srgbClr val="E2E5E1"/>
             </a:solidFill>
             <a:prstDash val="solid"/>
           </a:ln>
@@ -5646,7 +5646,7 @@
             <a:r>
               <a:rPr lang="en-US" sz="1000" i="1" dirty="0">
                 <a:solidFill>
-                  <a:srgbClr val="5B6475"/>
+                  <a:srgbClr val="575F5C"/>
                 </a:solidFill>
                 <a:latin typeface="Arial" pitchFamily="34" charset="0"/>
                 <a:ea typeface="Arial" pitchFamily="34" charset="-122"/>
@@ -5685,7 +5685,7 @@
             <a:r>
               <a:rPr lang="en-US" sz="900" dirty="0">
                 <a:solidFill>
-                  <a:srgbClr val="5B6475"/>
+                  <a:srgbClr val="575F5C"/>
                 </a:solidFill>
                 <a:latin typeface="Arial" pitchFamily="34" charset="0"/>
                 <a:ea typeface="Arial" pitchFamily="34" charset="-122"/>
@@ -5724,7 +5724,7 @@
             <a:r>
               <a:rPr lang="en-US" sz="900" dirty="0">
                 <a:solidFill>
-                  <a:srgbClr val="5B6475"/>
+                  <a:srgbClr val="575F5C"/>
                 </a:solidFill>
                 <a:latin typeface="Arial" pitchFamily="34" charset="0"/>
                 <a:ea typeface="Arial" pitchFamily="34" charset="-122"/>
@@ -5819,7 +5819,7 @@
             <a:r>
               <a:rPr lang="en-US" sz="1600" b="1" dirty="0">
                 <a:solidFill>
-                  <a:srgbClr val="0B0F19"/>
+                  <a:srgbClr val="14181A"/>
                 </a:solidFill>
                 <a:latin typeface="Arial" pitchFamily="34" charset="0"/>
                 <a:ea typeface="Arial" pitchFamily="34" charset="-122"/>
@@ -5858,7 +5858,7 @@
             <a:r>
               <a:rPr lang="en-US" sz="1000" dirty="0">
                 <a:solidFill>
-                  <a:srgbClr val="5B6475"/>
+                  <a:srgbClr val="575F5C"/>
                 </a:solidFill>
                 <a:latin typeface="Arial" pitchFamily="34" charset="0"/>
                 <a:ea typeface="Arial" pitchFamily="34" charset="-122"/>
@@ -5879,17 +5879,17 @@
         <p:spPr>
           <a:xfrm>
             <a:off x="731520" y="877824"/>
-            <a:ext cx="10725912" cy="25603"/>
+            <a:ext cx="10725912" cy="10973"/>
           </a:xfrm>
           <a:prstGeom prst="rect">
             <a:avLst/>
           </a:prstGeom>
           <a:solidFill>
-            <a:srgbClr val="38C9FF"/>
+            <a:srgbClr val="E2E5E1"/>
           </a:solidFill>
           <a:ln w="12700">
             <a:solidFill>
-              <a:srgbClr val="38C9FF"/>
+              <a:srgbClr val="E2E5E1"/>
             </a:solidFill>
             <a:prstDash val="solid"/>
           </a:ln>
@@ -5925,7 +5925,7 @@
             <a:r>
               <a:rPr lang="en-US" sz="2600" b="1" dirty="0">
                 <a:solidFill>
-                  <a:srgbClr val="4636B0"/>
+                  <a:srgbClr val="14181A"/>
                 </a:solidFill>
                 <a:latin typeface="Arial" pitchFamily="34" charset="0"/>
                 <a:ea typeface="Arial" pitchFamily="34" charset="-122"/>
@@ -5970,7 +5970,7 @@
             <a:r>
               <a:rPr lang="en-US" sz="1250" b="1" dirty="0">
                 <a:solidFill>
-                  <a:srgbClr val="0B0F19"/>
+                  <a:srgbClr val="14181A"/>
                 </a:solidFill>
                 <a:latin typeface="Arial" pitchFamily="34" charset="0"/>
                 <a:ea typeface="Arial" pitchFamily="34" charset="-122"/>
@@ -5990,7 +5990,7 @@
             <a:r>
               <a:rPr lang="en-US" sz="1250" dirty="0">
                 <a:solidFill>
-                  <a:srgbClr val="3D4556"/>
+                  <a:srgbClr val="3A423F"/>
                 </a:solidFill>
                 <a:latin typeface="Arial" pitchFamily="34" charset="0"/>
                 <a:ea typeface="Arial" pitchFamily="34" charset="-122"/>
@@ -6013,7 +6013,7 @@
             <a:r>
               <a:rPr lang="en-US" sz="1250" b="1" dirty="0">
                 <a:solidFill>
-                  <a:srgbClr val="0B0F19"/>
+                  <a:srgbClr val="14181A"/>
                 </a:solidFill>
                 <a:latin typeface="Arial" pitchFamily="34" charset="0"/>
                 <a:ea typeface="Arial" pitchFamily="34" charset="-122"/>
@@ -6033,7 +6033,7 @@
             <a:r>
               <a:rPr lang="en-US" sz="1250" dirty="0">
                 <a:solidFill>
-                  <a:srgbClr val="3D4556"/>
+                  <a:srgbClr val="3A423F"/>
                 </a:solidFill>
                 <a:latin typeface="Arial" pitchFamily="34" charset="0"/>
                 <a:ea typeface="Arial" pitchFamily="34" charset="-122"/>
@@ -6078,7 +6078,7 @@
             <a:r>
               <a:rPr lang="en-US" sz="1250" b="1" dirty="0">
                 <a:solidFill>
-                  <a:srgbClr val="0B0F19"/>
+                  <a:srgbClr val="14181A"/>
                 </a:solidFill>
                 <a:latin typeface="Arial" pitchFamily="34" charset="0"/>
                 <a:ea typeface="Arial" pitchFamily="34" charset="-122"/>
@@ -6098,7 +6098,7 @@
             <a:r>
               <a:rPr lang="en-US" sz="1250" dirty="0">
                 <a:solidFill>
-                  <a:srgbClr val="3D4556"/>
+                  <a:srgbClr val="3A423F"/>
                 </a:solidFill>
                 <a:latin typeface="Arial" pitchFamily="34" charset="0"/>
                 <a:ea typeface="Arial" pitchFamily="34" charset="-122"/>
@@ -6121,7 +6121,7 @@
             <a:r>
               <a:rPr lang="en-US" sz="1250" b="1" dirty="0">
                 <a:solidFill>
-                  <a:srgbClr val="0B0F19"/>
+                  <a:srgbClr val="14181A"/>
                 </a:solidFill>
                 <a:latin typeface="Arial" pitchFamily="34" charset="0"/>
                 <a:ea typeface="Arial" pitchFamily="34" charset="-122"/>
@@ -6141,7 +6141,7 @@
             <a:r>
               <a:rPr lang="en-US" sz="1250" dirty="0">
                 <a:solidFill>
-                  <a:srgbClr val="3D4556"/>
+                  <a:srgbClr val="3A423F"/>
                 </a:solidFill>
                 <a:latin typeface="Arial" pitchFamily="34" charset="0"/>
                 <a:ea typeface="Arial" pitchFamily="34" charset="-122"/>
@@ -6166,15 +6166,15 @@
           </a:xfrm>
           <a:prstGeom prst="roundRect">
             <a:avLst>
-              <a:gd name="adj" fmla="val 7273"/>
+              <a:gd name="adj" fmla="val 3636"/>
             </a:avLst>
           </a:prstGeom>
           <a:solidFill>
-            <a:srgbClr val="F4F5F9"/>
+            <a:srgbClr val="F2F3F1"/>
           </a:solidFill>
           <a:ln w="12700">
             <a:solidFill>
-              <a:srgbClr val="F4F5F9"/>
+              <a:srgbClr val="F2F3F1"/>
             </a:solidFill>
             <a:prstDash val="solid"/>
           </a:ln>
@@ -6207,7 +6207,7 @@
             <a:r>
               <a:rPr lang="en-US" sz="950" b="1" dirty="0">
                 <a:solidFill>
-                  <a:srgbClr val="5B6475"/>
+                  <a:srgbClr val="575F5C"/>
                 </a:solidFill>
                 <a:latin typeface="Arial" pitchFamily="34" charset="0"/>
                 <a:ea typeface="Arial" pitchFamily="34" charset="-122"/>
@@ -6249,7 +6249,7 @@
             <a:r>
               <a:rPr lang="en-US" sz="1150" i="1" dirty="0">
                 <a:solidFill>
-                  <a:srgbClr val="3D4556"/>
+                  <a:srgbClr val="3A423F"/>
                 </a:solidFill>
                 <a:latin typeface="Arial" pitchFamily="34" charset="0"/>
                 <a:ea typeface="Arial" pitchFamily="34" charset="-122"/>
@@ -6288,7 +6288,7 @@
             <a:r>
               <a:rPr lang="en-US" sz="900" dirty="0">
                 <a:solidFill>
-                  <a:srgbClr val="5B6475"/>
+                  <a:srgbClr val="575F5C"/>
                 </a:solidFill>
                 <a:latin typeface="Arial" pitchFamily="34" charset="0"/>
                 <a:ea typeface="Arial" pitchFamily="34" charset="-122"/>
@@ -6327,7 +6327,7 @@
             <a:r>
               <a:rPr lang="en-US" sz="900" dirty="0">
                 <a:solidFill>
-                  <a:srgbClr val="5B6475"/>
+                  <a:srgbClr val="575F5C"/>
                 </a:solidFill>
                 <a:latin typeface="Arial" pitchFamily="34" charset="0"/>
                 <a:ea typeface="Arial" pitchFamily="34" charset="-122"/>
@@ -6422,7 +6422,7 @@
             <a:r>
               <a:rPr lang="en-US" sz="1600" b="1" dirty="0">
                 <a:solidFill>
-                  <a:srgbClr val="0B0F19"/>
+                  <a:srgbClr val="14181A"/>
                 </a:solidFill>
                 <a:latin typeface="Arial" pitchFamily="34" charset="0"/>
                 <a:ea typeface="Arial" pitchFamily="34" charset="-122"/>
@@ -6461,7 +6461,7 @@
             <a:r>
               <a:rPr lang="en-US" sz="1000" dirty="0">
                 <a:solidFill>
-                  <a:srgbClr val="5B6475"/>
+                  <a:srgbClr val="575F5C"/>
                 </a:solidFill>
                 <a:latin typeface="Arial" pitchFamily="34" charset="0"/>
                 <a:ea typeface="Arial" pitchFamily="34" charset="-122"/>
@@ -6482,17 +6482,17 @@
         <p:spPr>
           <a:xfrm>
             <a:off x="731520" y="877824"/>
-            <a:ext cx="10725912" cy="25603"/>
+            <a:ext cx="10725912" cy="10973"/>
           </a:xfrm>
           <a:prstGeom prst="rect">
             <a:avLst/>
           </a:prstGeom>
           <a:solidFill>
-            <a:srgbClr val="38C9FF"/>
+            <a:srgbClr val="E2E5E1"/>
           </a:solidFill>
           <a:ln w="12700">
             <a:solidFill>
-              <a:srgbClr val="38C9FF"/>
+              <a:srgbClr val="E2E5E1"/>
             </a:solidFill>
             <a:prstDash val="solid"/>
           </a:ln>
@@ -6528,7 +6528,7 @@
             <a:r>
               <a:rPr lang="en-US" sz="2400" i="1" dirty="0">
                 <a:solidFill>
-                  <a:srgbClr val="4636B0"/>
+                  <a:srgbClr val="14181A"/>
                 </a:solidFill>
                 <a:latin typeface="Arial" pitchFamily="34" charset="0"/>
                 <a:ea typeface="Arial" pitchFamily="34" charset="-122"/>
@@ -6570,7 +6570,7 @@
             <a:r>
               <a:rPr lang="en-US" sz="1200" dirty="0">
                 <a:solidFill>
-                  <a:srgbClr val="5B6475"/>
+                  <a:srgbClr val="575F5C"/>
                 </a:solidFill>
                 <a:latin typeface="Arial" pitchFamily="34" charset="0"/>
                 <a:ea typeface="Arial" pitchFamily="34" charset="-122"/>
@@ -6615,7 +6615,7 @@
             <a:r>
               <a:rPr lang="en-US" sz="1300" b="1" dirty="0">
                 <a:solidFill>
-                  <a:srgbClr val="0B0F19"/>
+                  <a:srgbClr val="14181A"/>
                 </a:solidFill>
                 <a:latin typeface="Arial" pitchFamily="34" charset="0"/>
                 <a:ea typeface="Arial" pitchFamily="34" charset="-122"/>
@@ -6635,7 +6635,7 @@
             <a:r>
               <a:rPr lang="en-US" sz="1300" dirty="0">
                 <a:solidFill>
-                  <a:srgbClr val="3D4556"/>
+                  <a:srgbClr val="3A423F"/>
                 </a:solidFill>
                 <a:latin typeface="Arial" pitchFamily="34" charset="0"/>
                 <a:ea typeface="Arial" pitchFamily="34" charset="-122"/>
@@ -6658,7 +6658,7 @@
             <a:r>
               <a:rPr lang="en-US" sz="1300" b="1" dirty="0">
                 <a:solidFill>
-                  <a:srgbClr val="0B0F19"/>
+                  <a:srgbClr val="14181A"/>
                 </a:solidFill>
                 <a:latin typeface="Arial" pitchFamily="34" charset="0"/>
                 <a:ea typeface="Arial" pitchFamily="34" charset="-122"/>
@@ -6678,7 +6678,7 @@
             <a:r>
               <a:rPr lang="en-US" sz="1300" dirty="0">
                 <a:solidFill>
-                  <a:srgbClr val="3D4556"/>
+                  <a:srgbClr val="3A423F"/>
                 </a:solidFill>
                 <a:latin typeface="Arial" pitchFamily="34" charset="0"/>
                 <a:ea typeface="Arial" pitchFamily="34" charset="-122"/>
@@ -6701,7 +6701,7 @@
             <a:r>
               <a:rPr lang="en-US" sz="1300" b="1" dirty="0">
                 <a:solidFill>
-                  <a:srgbClr val="0B0F19"/>
+                  <a:srgbClr val="14181A"/>
                 </a:solidFill>
                 <a:latin typeface="Arial" pitchFamily="34" charset="0"/>
                 <a:ea typeface="Arial" pitchFamily="34" charset="-122"/>
@@ -6721,7 +6721,7 @@
             <a:r>
               <a:rPr lang="en-US" sz="1300" dirty="0">
                 <a:solidFill>
-                  <a:srgbClr val="3D4556"/>
+                  <a:srgbClr val="3A423F"/>
                 </a:solidFill>
                 <a:latin typeface="Arial" pitchFamily="34" charset="0"/>
                 <a:ea typeface="Arial" pitchFamily="34" charset="-122"/>
@@ -6760,7 +6760,7 @@
             <a:r>
               <a:rPr lang="en-US" sz="900" dirty="0">
                 <a:solidFill>
-                  <a:srgbClr val="5B6475"/>
+                  <a:srgbClr val="575F5C"/>
                 </a:solidFill>
                 <a:latin typeface="Arial" pitchFamily="34" charset="0"/>
                 <a:ea typeface="Arial" pitchFamily="34" charset="-122"/>
@@ -6799,7 +6799,7 @@
             <a:r>
               <a:rPr lang="en-US" sz="900" dirty="0">
                 <a:solidFill>
-                  <a:srgbClr val="5B6475"/>
+                  <a:srgbClr val="575F5C"/>
                 </a:solidFill>
                 <a:latin typeface="Arial" pitchFamily="34" charset="0"/>
                 <a:ea typeface="Arial" pitchFamily="34" charset="-122"/>
@@ -6894,7 +6894,7 @@
             <a:r>
               <a:rPr lang="en-US" sz="1600" b="1" dirty="0">
                 <a:solidFill>
-                  <a:srgbClr val="0B0F19"/>
+                  <a:srgbClr val="14181A"/>
                 </a:solidFill>
                 <a:latin typeface="Arial" pitchFamily="34" charset="0"/>
                 <a:ea typeface="Arial" pitchFamily="34" charset="-122"/>
@@ -6933,7 +6933,7 @@
             <a:r>
               <a:rPr lang="en-US" sz="1000" dirty="0">
                 <a:solidFill>
-                  <a:srgbClr val="5B6475"/>
+                  <a:srgbClr val="575F5C"/>
                 </a:solidFill>
                 <a:latin typeface="Arial" pitchFamily="34" charset="0"/>
                 <a:ea typeface="Arial" pitchFamily="34" charset="-122"/>
@@ -6954,17 +6954,17 @@
         <p:spPr>
           <a:xfrm>
             <a:off x="731520" y="877824"/>
-            <a:ext cx="10725912" cy="25603"/>
+            <a:ext cx="10725912" cy="10973"/>
           </a:xfrm>
           <a:prstGeom prst="rect">
             <a:avLst/>
           </a:prstGeom>
           <a:solidFill>
-            <a:srgbClr val="38C9FF"/>
+            <a:srgbClr val="E2E5E1"/>
           </a:solidFill>
           <a:ln w="12700">
             <a:solidFill>
-              <a:srgbClr val="38C9FF"/>
+              <a:srgbClr val="E2E5E1"/>
             </a:solidFill>
             <a:prstDash val="solid"/>
           </a:ln>
@@ -7000,7 +7000,7 @@
             <a:r>
               <a:rPr lang="en-US" sz="2600" b="1" dirty="0">
                 <a:solidFill>
-                  <a:srgbClr val="4636B0"/>
+                  <a:srgbClr val="14181A"/>
                 </a:solidFill>
                 <a:latin typeface="Arial" pitchFamily="34" charset="0"/>
                 <a:ea typeface="Arial" pitchFamily="34" charset="-122"/>
@@ -7095,7 +7095,7 @@
             <a:r>
               <a:rPr lang="en-US" sz="1050" b="1" dirty="0">
                 <a:solidFill>
-                  <a:srgbClr val="5B6475"/>
+                  <a:srgbClr val="575F5C"/>
                 </a:solidFill>
                 <a:latin typeface="Arial" pitchFamily="34" charset="0"/>
                 <a:ea typeface="Arial" pitchFamily="34" charset="-122"/>
@@ -7134,7 +7134,7 @@
             <a:r>
               <a:rPr lang="en-US" sz="1050" b="1" dirty="0">
                 <a:solidFill>
-                  <a:srgbClr val="5B6475"/>
+                  <a:srgbClr val="575F5C"/>
                 </a:solidFill>
                 <a:latin typeface="Arial" pitchFamily="34" charset="0"/>
                 <a:ea typeface="Arial" pitchFamily="34" charset="-122"/>
@@ -7173,7 +7173,7 @@
             <a:r>
               <a:rPr lang="en-US" sz="1050" b="1" dirty="0">
                 <a:solidFill>
-                  <a:srgbClr val="1F7A5C"/>
+                  <a:srgbClr val="15704F"/>
                 </a:solidFill>
                 <a:latin typeface="Arial" pitchFamily="34" charset="0"/>
                 <a:ea typeface="Arial" pitchFamily="34" charset="-122"/>
@@ -7202,7 +7202,7 @@
           <a:noFill/>
           <a:ln w="9525">
             <a:solidFill>
-              <a:srgbClr val="E3E6EE"/>
+              <a:srgbClr val="E2E5E1"/>
             </a:solidFill>
             <a:prstDash val="solid"/>
           </a:ln>
@@ -7235,7 +7235,7 @@
             <a:r>
               <a:rPr lang="en-US" sz="1500" b="1" dirty="0">
                 <a:solidFill>
-                  <a:srgbClr val="0B0F19"/>
+                  <a:srgbClr val="14181A"/>
                 </a:solidFill>
                 <a:latin typeface="Arial" pitchFamily="34" charset="0"/>
                 <a:ea typeface="Arial" pitchFamily="34" charset="-122"/>
@@ -7274,7 +7274,7 @@
             <a:r>
               <a:rPr lang="en-US" sz="1700" b="1" dirty="0">
                 <a:solidFill>
-                  <a:srgbClr val="4636B0"/>
+                  <a:srgbClr val="14181A"/>
                 </a:solidFill>
                 <a:latin typeface="Arial" pitchFamily="34" charset="0"/>
                 <a:ea typeface="Arial" pitchFamily="34" charset="-122"/>
@@ -7313,7 +7313,7 @@
             <a:r>
               <a:rPr lang="en-US" sz="1700" b="1" dirty="0">
                 <a:solidFill>
-                  <a:srgbClr val="4636B0"/>
+                  <a:srgbClr val="14181A"/>
                 </a:solidFill>
                 <a:latin typeface="Arial" pitchFamily="34" charset="0"/>
                 <a:ea typeface="Arial" pitchFamily="34" charset="-122"/>
@@ -7352,7 +7352,7 @@
             <a:r>
               <a:rPr lang="en-US" sz="1700" b="1" dirty="0">
                 <a:solidFill>
-                  <a:srgbClr val="1F7A5C"/>
+                  <a:srgbClr val="15704F"/>
                 </a:solidFill>
                 <a:latin typeface="Arial" pitchFamily="34" charset="0"/>
                 <a:ea typeface="Arial" pitchFamily="34" charset="-122"/>
@@ -7391,13 +7391,13 @@
             <a:r>
               <a:rPr lang="en-US" sz="1000" dirty="0">
                 <a:solidFill>
-                  <a:srgbClr val="5B6475"/>
-                </a:solidFill>
-                <a:latin typeface="Arial" pitchFamily="34" charset="0"/>
-                <a:ea typeface="Arial" pitchFamily="34" charset="-122"/>
-                <a:cs typeface="Arial" pitchFamily="34" charset="-120"/>
-              </a:rPr>
-              <a:t>2 appareils</a:t>
+                  <a:srgbClr val="575F5C"/>
+                </a:solidFill>
+                <a:latin typeface="Arial" pitchFamily="34" charset="0"/>
+                <a:ea typeface="Arial" pitchFamily="34" charset="-122"/>
+                <a:cs typeface="Arial" pitchFamily="34" charset="-120"/>
+              </a:rPr>
+              <a:t>Jusqu’à 2 appareils</a:t>
             </a:r>
             <a:endParaRPr lang="en-US" sz="1000" dirty="0"/>
           </a:p>
@@ -7420,7 +7420,7 @@
           <a:noFill/>
           <a:ln w="9525">
             <a:solidFill>
-              <a:srgbClr val="E3E6EE"/>
+              <a:srgbClr val="E2E5E1"/>
             </a:solidFill>
             <a:prstDash val="solid"/>
           </a:ln>
@@ -7453,7 +7453,7 @@
             <a:r>
               <a:rPr lang="en-US" sz="1500" b="1" dirty="0">
                 <a:solidFill>
-                  <a:srgbClr val="0B0F19"/>
+                  <a:srgbClr val="14181A"/>
                 </a:solidFill>
                 <a:latin typeface="Arial" pitchFamily="34" charset="0"/>
                 <a:ea typeface="Arial" pitchFamily="34" charset="-122"/>
@@ -7492,7 +7492,7 @@
             <a:r>
               <a:rPr lang="en-US" sz="1700" b="1" dirty="0">
                 <a:solidFill>
-                  <a:srgbClr val="4636B0"/>
+                  <a:srgbClr val="14181A"/>
                 </a:solidFill>
                 <a:latin typeface="Arial" pitchFamily="34" charset="0"/>
                 <a:ea typeface="Arial" pitchFamily="34" charset="-122"/>
@@ -7531,7 +7531,7 @@
             <a:r>
               <a:rPr lang="en-US" sz="1700" b="1" dirty="0">
                 <a:solidFill>
-                  <a:srgbClr val="4636B0"/>
+                  <a:srgbClr val="14181A"/>
                 </a:solidFill>
                 <a:latin typeface="Arial" pitchFamily="34" charset="0"/>
                 <a:ea typeface="Arial" pitchFamily="34" charset="-122"/>
@@ -7570,7 +7570,7 @@
             <a:r>
               <a:rPr lang="en-US" sz="1700" b="1" dirty="0">
                 <a:solidFill>
-                  <a:srgbClr val="1F7A5C"/>
+                  <a:srgbClr val="15704F"/>
                 </a:solidFill>
                 <a:latin typeface="Arial" pitchFamily="34" charset="0"/>
                 <a:ea typeface="Arial" pitchFamily="34" charset="-122"/>
@@ -7609,13 +7609,13 @@
             <a:r>
               <a:rPr lang="en-US" sz="1000" dirty="0">
                 <a:solidFill>
-                  <a:srgbClr val="5B6475"/>
-                </a:solidFill>
-                <a:latin typeface="Arial" pitchFamily="34" charset="0"/>
-                <a:ea typeface="Arial" pitchFamily="34" charset="-122"/>
-                <a:cs typeface="Arial" pitchFamily="34" charset="-120"/>
-              </a:rPr>
-              <a:t>3 à 20 appareils</a:t>
+                  <a:srgbClr val="575F5C"/>
+                </a:solidFill>
+                <a:latin typeface="Arial" pitchFamily="34" charset="0"/>
+                <a:ea typeface="Arial" pitchFamily="34" charset="-122"/>
+                <a:cs typeface="Arial" pitchFamily="34" charset="-120"/>
+              </a:rPr>
+              <a:t>Jusqu’à 20 appareils</a:t>
             </a:r>
             <a:endParaRPr lang="en-US" sz="1000" dirty="0"/>
           </a:p>
@@ -7638,7 +7638,7 @@
           <a:noFill/>
           <a:ln w="9525">
             <a:solidFill>
-              <a:srgbClr val="E3E6EE"/>
+              <a:srgbClr val="E2E5E1"/>
             </a:solidFill>
             <a:prstDash val="solid"/>
           </a:ln>
@@ -7671,7 +7671,7 @@
             <a:r>
               <a:rPr lang="en-US" sz="1500" b="1" dirty="0">
                 <a:solidFill>
-                  <a:srgbClr val="0B0F19"/>
+                  <a:srgbClr val="14181A"/>
                 </a:solidFill>
                 <a:latin typeface="Arial" pitchFamily="34" charset="0"/>
                 <a:ea typeface="Arial" pitchFamily="34" charset="-122"/>
@@ -7710,7 +7710,7 @@
             <a:r>
               <a:rPr lang="en-US" sz="1700" b="1" dirty="0">
                 <a:solidFill>
-                  <a:srgbClr val="4636B0"/>
+                  <a:srgbClr val="14181A"/>
                 </a:solidFill>
                 <a:latin typeface="Arial" pitchFamily="34" charset="0"/>
                 <a:ea typeface="Arial" pitchFamily="34" charset="-122"/>
@@ -7749,7 +7749,7 @@
             <a:r>
               <a:rPr lang="en-US" sz="1700" b="1" dirty="0">
                 <a:solidFill>
-                  <a:srgbClr val="4636B0"/>
+                  <a:srgbClr val="14181A"/>
                 </a:solidFill>
                 <a:latin typeface="Arial" pitchFamily="34" charset="0"/>
                 <a:ea typeface="Arial" pitchFamily="34" charset="-122"/>
@@ -7788,7 +7788,7 @@
             <a:r>
               <a:rPr lang="en-US" sz="1700" b="1" dirty="0">
                 <a:solidFill>
-                  <a:srgbClr val="1F7A5C"/>
+                  <a:srgbClr val="15704F"/>
                 </a:solidFill>
                 <a:latin typeface="Arial" pitchFamily="34" charset="0"/>
                 <a:ea typeface="Arial" pitchFamily="34" charset="-122"/>
@@ -7827,13 +7827,13 @@
             <a:r>
               <a:rPr lang="en-US" sz="1000" dirty="0">
                 <a:solidFill>
-                  <a:srgbClr val="5B6475"/>
-                </a:solidFill>
-                <a:latin typeface="Arial" pitchFamily="34" charset="0"/>
-                <a:ea typeface="Arial" pitchFamily="34" charset="-122"/>
-                <a:cs typeface="Arial" pitchFamily="34" charset="-120"/>
-              </a:rPr>
-              <a:t>21 à 100 appareils</a:t>
+                  <a:srgbClr val="575F5C"/>
+                </a:solidFill>
+                <a:latin typeface="Arial" pitchFamily="34" charset="0"/>
+                <a:ea typeface="Arial" pitchFamily="34" charset="-122"/>
+                <a:cs typeface="Arial" pitchFamily="34" charset="-120"/>
+              </a:rPr>
+              <a:t>Jusqu’à 100 appareils</a:t>
             </a:r>
             <a:endParaRPr lang="en-US" sz="1000" dirty="0"/>
           </a:p>
@@ -7856,7 +7856,7 @@
           <a:noFill/>
           <a:ln w="9525">
             <a:solidFill>
-              <a:srgbClr val="E3E6EE"/>
+              <a:srgbClr val="E2E5E1"/>
             </a:solidFill>
             <a:prstDash val="solid"/>
           </a:ln>
@@ -7895,7 +7895,7 @@
             <a:r>
               <a:rPr lang="en-US" sz="1250" b="1" dirty="0">
                 <a:solidFill>
-                  <a:srgbClr val="0B0F19"/>
+                  <a:srgbClr val="14181A"/>
                 </a:solidFill>
                 <a:latin typeface="Arial" pitchFamily="34" charset="0"/>
                 <a:ea typeface="Arial" pitchFamily="34" charset="-122"/>
@@ -7915,7 +7915,7 @@
             <a:r>
               <a:rPr lang="en-US" sz="1250" dirty="0">
                 <a:solidFill>
-                  <a:srgbClr val="3D4556"/>
+                  <a:srgbClr val="3A423F"/>
                 </a:solidFill>
                 <a:latin typeface="Arial" pitchFamily="34" charset="0"/>
                 <a:ea typeface="Arial" pitchFamily="34" charset="-122"/>
@@ -7940,15 +7940,15 @@
           </a:xfrm>
           <a:prstGeom prst="roundRect">
             <a:avLst>
-              <a:gd name="adj" fmla="val 8000"/>
+              <a:gd name="adj" fmla="val 4000"/>
             </a:avLst>
           </a:prstGeom>
           <a:solidFill>
-            <a:srgbClr val="F4F5F9"/>
+            <a:srgbClr val="F2F3F1"/>
           </a:solidFill>
           <a:ln w="12700">
             <a:solidFill>
-              <a:srgbClr val="F4F5F9"/>
+              <a:srgbClr val="F2F3F1"/>
             </a:solidFill>
             <a:prstDash val="solid"/>
           </a:ln>
@@ -7981,7 +7981,7 @@
             <a:r>
               <a:rPr lang="en-US" sz="950" b="1" dirty="0">
                 <a:solidFill>
-                  <a:srgbClr val="5B6475"/>
+                  <a:srgbClr val="575F5C"/>
                 </a:solidFill>
                 <a:latin typeface="Arial" pitchFamily="34" charset="0"/>
                 <a:ea typeface="Arial" pitchFamily="34" charset="-122"/>
@@ -8023,7 +8023,7 @@
             <a:r>
               <a:rPr lang="en-US" sz="1150" i="1" dirty="0">
                 <a:solidFill>
-                  <a:srgbClr val="3D4556"/>
+                  <a:srgbClr val="3A423F"/>
                 </a:solidFill>
                 <a:latin typeface="Arial" pitchFamily="34" charset="0"/>
                 <a:ea typeface="Arial" pitchFamily="34" charset="-122"/>
@@ -8062,7 +8062,7 @@
             <a:r>
               <a:rPr lang="en-US" sz="900" dirty="0">
                 <a:solidFill>
-                  <a:srgbClr val="5B6475"/>
+                  <a:srgbClr val="575F5C"/>
                 </a:solidFill>
                 <a:latin typeface="Arial" pitchFamily="34" charset="0"/>
                 <a:ea typeface="Arial" pitchFamily="34" charset="-122"/>
@@ -8101,7 +8101,7 @@
             <a:r>
               <a:rPr lang="en-US" sz="900" dirty="0">
                 <a:solidFill>
-                  <a:srgbClr val="5B6475"/>
+                  <a:srgbClr val="575F5C"/>
                 </a:solidFill>
                 <a:latin typeface="Arial" pitchFamily="34" charset="0"/>
                 <a:ea typeface="Arial" pitchFamily="34" charset="-122"/>
@@ -8196,7 +8196,7 @@
             <a:r>
               <a:rPr lang="en-US" sz="1600" b="1" dirty="0">
                 <a:solidFill>
-                  <a:srgbClr val="0B0F19"/>
+                  <a:srgbClr val="14181A"/>
                 </a:solidFill>
                 <a:latin typeface="Arial" pitchFamily="34" charset="0"/>
                 <a:ea typeface="Arial" pitchFamily="34" charset="-122"/>
@@ -8235,7 +8235,7 @@
             <a:r>
               <a:rPr lang="en-US" sz="1000" dirty="0">
                 <a:solidFill>
-                  <a:srgbClr val="5B6475"/>
+                  <a:srgbClr val="575F5C"/>
                 </a:solidFill>
                 <a:latin typeface="Arial" pitchFamily="34" charset="0"/>
                 <a:ea typeface="Arial" pitchFamily="34" charset="-122"/>
@@ -8256,17 +8256,17 @@
         <p:spPr>
           <a:xfrm>
             <a:off x="731520" y="877824"/>
-            <a:ext cx="10725912" cy="25603"/>
+            <a:ext cx="10725912" cy="10973"/>
           </a:xfrm>
           <a:prstGeom prst="rect">
             <a:avLst/>
           </a:prstGeom>
           <a:solidFill>
-            <a:srgbClr val="38C9FF"/>
+            <a:srgbClr val="E2E5E1"/>
           </a:solidFill>
           <a:ln w="12700">
             <a:solidFill>
-              <a:srgbClr val="38C9FF"/>
+              <a:srgbClr val="E2E5E1"/>
             </a:solidFill>
             <a:prstDash val="solid"/>
           </a:ln>
@@ -8302,7 +8302,7 @@
             <a:r>
               <a:rPr lang="en-US" sz="2500" b="1" dirty="0">
                 <a:solidFill>
-                  <a:srgbClr val="4636B0"/>
+                  <a:srgbClr val="14181A"/>
                 </a:solidFill>
                 <a:latin typeface="Arial" pitchFamily="34" charset="0"/>
                 <a:ea typeface="Arial" pitchFamily="34" charset="-122"/>
@@ -8347,7 +8347,7 @@
             <a:r>
               <a:rPr lang="en-US" sz="1250" b="1" dirty="0">
                 <a:solidFill>
-                  <a:srgbClr val="0B0F19"/>
+                  <a:srgbClr val="14181A"/>
                 </a:solidFill>
                 <a:latin typeface="Arial" pitchFamily="34" charset="0"/>
                 <a:ea typeface="Arial" pitchFamily="34" charset="-122"/>
@@ -8367,7 +8367,7 @@
             <a:r>
               <a:rPr lang="en-US" sz="1250" dirty="0">
                 <a:solidFill>
-                  <a:srgbClr val="3D4556"/>
+                  <a:srgbClr val="3A423F"/>
                 </a:solidFill>
                 <a:latin typeface="Arial" pitchFamily="34" charset="0"/>
                 <a:ea typeface="Arial" pitchFamily="34" charset="-122"/>
@@ -8390,7 +8390,7 @@
             <a:r>
               <a:rPr lang="en-US" sz="1250" b="1" dirty="0">
                 <a:solidFill>
-                  <a:srgbClr val="0B0F19"/>
+                  <a:srgbClr val="14181A"/>
                 </a:solidFill>
                 <a:latin typeface="Arial" pitchFamily="34" charset="0"/>
                 <a:ea typeface="Arial" pitchFamily="34" charset="-122"/>
@@ -8410,7 +8410,7 @@
             <a:r>
               <a:rPr lang="en-US" sz="1250" dirty="0">
                 <a:solidFill>
-                  <a:srgbClr val="3D4556"/>
+                  <a:srgbClr val="3A423F"/>
                 </a:solidFill>
                 <a:latin typeface="Arial" pitchFamily="34" charset="0"/>
                 <a:ea typeface="Arial" pitchFamily="34" charset="-122"/>
@@ -8433,7 +8433,7 @@
             <a:r>
               <a:rPr lang="en-US" sz="1250" b="1" dirty="0">
                 <a:solidFill>
-                  <a:srgbClr val="0B0F19"/>
+                  <a:srgbClr val="14181A"/>
                 </a:solidFill>
                 <a:latin typeface="Arial" pitchFamily="34" charset="0"/>
                 <a:ea typeface="Arial" pitchFamily="34" charset="-122"/>
@@ -8453,7 +8453,7 @@
             <a:r>
               <a:rPr lang="en-US" sz="1250" dirty="0">
                 <a:solidFill>
-                  <a:srgbClr val="3D4556"/>
+                  <a:srgbClr val="3A423F"/>
                 </a:solidFill>
                 <a:latin typeface="Arial" pitchFamily="34" charset="0"/>
                 <a:ea typeface="Arial" pitchFamily="34" charset="-122"/>
@@ -8478,7 +8478,7 @@
           </a:xfrm>
           <a:prstGeom prst="roundRect">
             <a:avLst>
-              <a:gd name="adj" fmla="val 2113"/>
+              <a:gd name="adj" fmla="val 1057"/>
             </a:avLst>
           </a:prstGeom>
           <a:solidFill>
@@ -8486,7 +8486,7 @@
           </a:solidFill>
           <a:ln w="12700">
             <a:solidFill>
-              <a:srgbClr val="E3E6EE"/>
+              <a:srgbClr val="E2E5E1"/>
             </a:solidFill>
             <a:prstDash val="solid"/>
           </a:ln>
@@ -8543,7 +8543,7 @@
             <a:r>
               <a:rPr lang="en-US" sz="1000" i="1" dirty="0">
                 <a:solidFill>
-                  <a:srgbClr val="5B6475"/>
+                  <a:srgbClr val="575F5C"/>
                 </a:solidFill>
                 <a:latin typeface="Arial" pitchFamily="34" charset="0"/>
                 <a:ea typeface="Arial" pitchFamily="34" charset="-122"/>
@@ -8582,7 +8582,7 @@
             <a:r>
               <a:rPr lang="en-US" sz="900" dirty="0">
                 <a:solidFill>
-                  <a:srgbClr val="5B6475"/>
+                  <a:srgbClr val="575F5C"/>
                 </a:solidFill>
                 <a:latin typeface="Arial" pitchFamily="34" charset="0"/>
                 <a:ea typeface="Arial" pitchFamily="34" charset="-122"/>
@@ -8621,7 +8621,7 @@
             <a:r>
               <a:rPr lang="en-US" sz="900" dirty="0">
                 <a:solidFill>
-                  <a:srgbClr val="5B6475"/>
+                  <a:srgbClr val="575F5C"/>
                 </a:solidFill>
                 <a:latin typeface="Arial" pitchFamily="34" charset="0"/>
                 <a:ea typeface="Arial" pitchFamily="34" charset="-122"/>
@@ -8716,7 +8716,7 @@
             <a:r>
               <a:rPr lang="en-US" sz="1600" b="1" dirty="0">
                 <a:solidFill>
-                  <a:srgbClr val="0B0F19"/>
+                  <a:srgbClr val="14181A"/>
                 </a:solidFill>
                 <a:latin typeface="Arial" pitchFamily="34" charset="0"/>
                 <a:ea typeface="Arial" pitchFamily="34" charset="-122"/>
@@ -8755,7 +8755,7 @@
             <a:r>
               <a:rPr lang="en-US" sz="1000" dirty="0">
                 <a:solidFill>
-                  <a:srgbClr val="5B6475"/>
+                  <a:srgbClr val="575F5C"/>
                 </a:solidFill>
                 <a:latin typeface="Arial" pitchFamily="34" charset="0"/>
                 <a:ea typeface="Arial" pitchFamily="34" charset="-122"/>
@@ -8776,17 +8776,17 @@
         <p:spPr>
           <a:xfrm>
             <a:off x="731520" y="877824"/>
-            <a:ext cx="10725912" cy="25603"/>
+            <a:ext cx="10725912" cy="10973"/>
           </a:xfrm>
           <a:prstGeom prst="rect">
             <a:avLst/>
           </a:prstGeom>
           <a:solidFill>
-            <a:srgbClr val="38C9FF"/>
+            <a:srgbClr val="E2E5E1"/>
           </a:solidFill>
           <a:ln w="12700">
             <a:solidFill>
-              <a:srgbClr val="38C9FF"/>
+              <a:srgbClr val="E2E5E1"/>
             </a:solidFill>
             <a:prstDash val="solid"/>
           </a:ln>
@@ -8822,7 +8822,7 @@
             <a:r>
               <a:rPr lang="en-US" sz="2600" b="1" dirty="0">
                 <a:solidFill>
-                  <a:srgbClr val="4636B0"/>
+                  <a:srgbClr val="14181A"/>
                 </a:solidFill>
                 <a:latin typeface="Arial" pitchFamily="34" charset="0"/>
                 <a:ea typeface="Arial" pitchFamily="34" charset="-122"/>
@@ -8864,7 +8864,7 @@
             <a:r>
               <a:rPr lang="en-US" sz="1350" b="1" dirty="0">
                 <a:solidFill>
-                  <a:srgbClr val="4636B0"/>
+                  <a:srgbClr val="14181A"/>
                 </a:solidFill>
                 <a:latin typeface="Arial" pitchFamily="34" charset="0"/>
                 <a:ea typeface="Arial" pitchFamily="34" charset="-122"/>
@@ -8906,7 +8906,7 @@
             <a:r>
               <a:rPr lang="en-US" sz="1150" dirty="0">
                 <a:solidFill>
-                  <a:srgbClr val="3D4556"/>
+                  <a:srgbClr val="3A423F"/>
                 </a:solidFill>
                 <a:latin typeface="Arial" pitchFamily="34" charset="0"/>
                 <a:ea typeface="Arial" pitchFamily="34" charset="-122"/>
@@ -8948,7 +8948,7 @@
             <a:r>
               <a:rPr lang="en-US" sz="1350" b="1" dirty="0">
                 <a:solidFill>
-                  <a:srgbClr val="4636B0"/>
+                  <a:srgbClr val="14181A"/>
                 </a:solidFill>
                 <a:latin typeface="Arial" pitchFamily="34" charset="0"/>
                 <a:ea typeface="Arial" pitchFamily="34" charset="-122"/>
@@ -8990,7 +8990,7 @@
             <a:r>
               <a:rPr lang="en-US" sz="1150" dirty="0">
                 <a:solidFill>
-                  <a:srgbClr val="3D4556"/>
+                  <a:srgbClr val="3A423F"/>
                 </a:solidFill>
                 <a:latin typeface="Arial" pitchFamily="34" charset="0"/>
                 <a:ea typeface="Arial" pitchFamily="34" charset="-122"/>
@@ -9032,7 +9032,7 @@
             <a:r>
               <a:rPr lang="en-US" sz="1350" b="1" dirty="0">
                 <a:solidFill>
-                  <a:srgbClr val="4636B0"/>
+                  <a:srgbClr val="14181A"/>
                 </a:solidFill>
                 <a:latin typeface="Arial" pitchFamily="34" charset="0"/>
                 <a:ea typeface="Arial" pitchFamily="34" charset="-122"/>
@@ -9074,7 +9074,7 @@
             <a:r>
               <a:rPr lang="en-US" sz="1150" dirty="0">
                 <a:solidFill>
-                  <a:srgbClr val="3D4556"/>
+                  <a:srgbClr val="3A423F"/>
                 </a:solidFill>
                 <a:latin typeface="Arial" pitchFamily="34" charset="0"/>
                 <a:ea typeface="Arial" pitchFamily="34" charset="-122"/>
@@ -9116,7 +9116,7 @@
             <a:r>
               <a:rPr lang="en-US" sz="1350" b="1" dirty="0">
                 <a:solidFill>
-                  <a:srgbClr val="4636B0"/>
+                  <a:srgbClr val="14181A"/>
                 </a:solidFill>
                 <a:latin typeface="Arial" pitchFamily="34" charset="0"/>
                 <a:ea typeface="Arial" pitchFamily="34" charset="-122"/>
@@ -9158,7 +9158,7 @@
             <a:r>
               <a:rPr lang="en-US" sz="1150" dirty="0">
                 <a:solidFill>
-                  <a:srgbClr val="3D4556"/>
+                  <a:srgbClr val="3A423F"/>
                 </a:solidFill>
                 <a:latin typeface="Arial" pitchFamily="34" charset="0"/>
                 <a:ea typeface="Arial" pitchFamily="34" charset="-122"/>
@@ -9197,7 +9197,7 @@
             <a:r>
               <a:rPr lang="en-US" sz="900" dirty="0">
                 <a:solidFill>
-                  <a:srgbClr val="5B6475"/>
+                  <a:srgbClr val="575F5C"/>
                 </a:solidFill>
                 <a:latin typeface="Arial" pitchFamily="34" charset="0"/>
                 <a:ea typeface="Arial" pitchFamily="34" charset="-122"/>
@@ -9236,7 +9236,7 @@
             <a:r>
               <a:rPr lang="en-US" sz="900" dirty="0">
                 <a:solidFill>
-                  <a:srgbClr val="5B6475"/>
+                  <a:srgbClr val="575F5C"/>
                 </a:solidFill>
                 <a:latin typeface="Arial" pitchFamily="34" charset="0"/>
                 <a:ea typeface="Arial" pitchFamily="34" charset="-122"/>
